--- a/public/lessons/year-6-maths/summer/week-22/solve-equations-with-brackets/teaching-powerpoint-v1.pptx
+++ b/public/lessons/year-6-maths/summer/week-22/solve-equations-with-brackets/teaching-powerpoint-v1.pptx
@@ -2,24 +2,24 @@
 <file path=ppt/presentation.xml><?xml version="1.0" encoding="utf-8"?>
 <p:presentation xmlns:p="http://schemas.openxmlformats.org/presentationml/2006/main">
   <p:sldMasterIdLst>
-    <p:sldMasterId xmlns:r="http://schemas.openxmlformats.org/officeDocument/2006/relationships" id="2147483648" r:id="Rbec1c72630b7465e"/>
+    <p:sldMasterId xmlns:r="http://schemas.openxmlformats.org/officeDocument/2006/relationships" id="2147483648" r:id="Rb76b87df2ed1473a"/>
   </p:sldMasterIdLst>
   <p:notesMasterIdLst>
-    <p:notesMasterId xmlns:r="http://schemas.openxmlformats.org/officeDocument/2006/relationships" r:id="R555f0bfe98b549ae"/>
+    <p:notesMasterId xmlns:r="http://schemas.openxmlformats.org/officeDocument/2006/relationships" r:id="R201f95fa125b49da"/>
   </p:notesMasterIdLst>
   <p:sldIdLst>
-    <p:sldId xmlns:r="http://schemas.openxmlformats.org/officeDocument/2006/relationships" id="256" r:id="R17240da9dcfd4736"/>
-    <p:sldId xmlns:r="http://schemas.openxmlformats.org/officeDocument/2006/relationships" id="257" r:id="Rfb1a4b95c3594d75"/>
-    <p:sldId xmlns:r="http://schemas.openxmlformats.org/officeDocument/2006/relationships" id="258" r:id="R816283520ff04dbe"/>
-    <p:sldId xmlns:r="http://schemas.openxmlformats.org/officeDocument/2006/relationships" id="259" r:id="R5d5e7634fc5a4bd3"/>
-    <p:sldId xmlns:r="http://schemas.openxmlformats.org/officeDocument/2006/relationships" id="260" r:id="R0c35de582a234f9d"/>
-    <p:sldId xmlns:r="http://schemas.openxmlformats.org/officeDocument/2006/relationships" id="261" r:id="Re628359a5cf04e72"/>
-    <p:sldId xmlns:r="http://schemas.openxmlformats.org/officeDocument/2006/relationships" id="262" r:id="R9eddec6a0e31438e"/>
-    <p:sldId xmlns:r="http://schemas.openxmlformats.org/officeDocument/2006/relationships" id="263" r:id="Rfe1c9fbea317481b"/>
-    <p:sldId xmlns:r="http://schemas.openxmlformats.org/officeDocument/2006/relationships" id="264" r:id="Rb633276908664cd6"/>
-    <p:sldId xmlns:r="http://schemas.openxmlformats.org/officeDocument/2006/relationships" id="265" r:id="Rb862764c77e04771"/>
-    <p:sldId xmlns:r="http://schemas.openxmlformats.org/officeDocument/2006/relationships" id="266" r:id="R30a7be4e29504f4a"/>
-    <p:sldId xmlns:r="http://schemas.openxmlformats.org/officeDocument/2006/relationships" id="267" r:id="Rd09fdde7939a43ed"/>
+    <p:sldId xmlns:r="http://schemas.openxmlformats.org/officeDocument/2006/relationships" id="256" r:id="Rc7d27451053641be"/>
+    <p:sldId xmlns:r="http://schemas.openxmlformats.org/officeDocument/2006/relationships" id="257" r:id="R5ddcfc5cd68e4bd3"/>
+    <p:sldId xmlns:r="http://schemas.openxmlformats.org/officeDocument/2006/relationships" id="258" r:id="R4aaa31a742114a78"/>
+    <p:sldId xmlns:r="http://schemas.openxmlformats.org/officeDocument/2006/relationships" id="259" r:id="R7a008980944b4ca3"/>
+    <p:sldId xmlns:r="http://schemas.openxmlformats.org/officeDocument/2006/relationships" id="260" r:id="R08946b0eed954ca3"/>
+    <p:sldId xmlns:r="http://schemas.openxmlformats.org/officeDocument/2006/relationships" id="261" r:id="R13fbf182687e416c"/>
+    <p:sldId xmlns:r="http://schemas.openxmlformats.org/officeDocument/2006/relationships" id="262" r:id="R8b461f7939ae410a"/>
+    <p:sldId xmlns:r="http://schemas.openxmlformats.org/officeDocument/2006/relationships" id="263" r:id="Ra13e65011d8a4de3"/>
+    <p:sldId xmlns:r="http://schemas.openxmlformats.org/officeDocument/2006/relationships" id="264" r:id="R0e5969a4f2df47ef"/>
+    <p:sldId xmlns:r="http://schemas.openxmlformats.org/officeDocument/2006/relationships" id="265" r:id="R37d0a386654146a3"/>
+    <p:sldId xmlns:r="http://schemas.openxmlformats.org/officeDocument/2006/relationships" id="266" r:id="R4057131469ec48ac"/>
+    <p:sldId xmlns:r="http://schemas.openxmlformats.org/officeDocument/2006/relationships" id="267" r:id="Rda24e89e1d6d4b0f"/>
   </p:sldIdLst>
   <p:sldSz cx="12192000" cy="6858000"/>
   <p:notesSz cx="6858000" cy="9144000"/>
@@ -873,7 +873,7 @@
           <a:lstStyle xmlns:a="http://schemas.openxmlformats.org/drawingml/2006/main"/>
           <a:p xmlns:a="http://schemas.openxmlformats.org/drawingml/2006/main">
             <a:r>
-              <a:t>I do. Reveal the question, setup and each calculation stage one click at a time. Pupils watch before copying. Model answer: x = 8.</a:t>
+              <a:t>I do. Reveal the question, then reveal each mathematical change one click at a time. Point to the numbers and operation that changed before moving to the next line. Final answer: x = 8.</a:t>
             </a:r>
           </a:p>
         </p:txBody>
@@ -1291,7 +1291,7 @@
   </p:cSld>
   <p:clrMap bg1="lt1" tx1="dk1" bg2="lt2" tx2="dk2" accent1="accent1" accent2="accent2" accent3="accent3" accent4="accent4" accent5="accent5" accent6="accent6" hlink="hlink" folHlink="folHlink"/>
   <p:sldLayoutIdLst>
-    <p:sldLayoutId xmlns:r="http://schemas.openxmlformats.org/officeDocument/2006/relationships" id="2147483649" r:id="Rbee6f80f4e824969"/>
+    <p:sldLayoutId xmlns:r="http://schemas.openxmlformats.org/officeDocument/2006/relationships" id="2147483649" r:id="R755b2e0a6c464ae1"/>
   </p:sldLayoutIdLst>
   <p:txStyles>
     <p:titleStyle>
@@ -1842,7 +1842,7 @@
           <p:cNvPr id="12" name="">
             <a:extLst xmlns:a="http://schemas.openxmlformats.org/drawingml/2006/main">
               <a:ext uri="{FF2B5EF4-FFF2-40B4-BE49-F238E27FC236}">
-                <a16:creationId xmlns:a16="http://schemas.microsoft.com/office/drawing/2014/main" id="{8F55627C-6BED-400E-B86B-7FA29DF1CAEB}"/>
+                <a16:creationId xmlns:a16="http://schemas.microsoft.com/office/drawing/2014/main" id="{51712E44-1391-457F-B4B1-35563F9A925B}"/>
               </a:ext>
             </a:extLst>
           </p:cNvPr>
@@ -1874,7 +1874,7 @@
           <p:cNvPr id="2" name="">
             <a:extLst xmlns:a="http://schemas.openxmlformats.org/drawingml/2006/main">
               <a:ext uri="{FF2B5EF4-FFF2-40B4-BE49-F238E27FC236}">
-                <a16:creationId xmlns:a16="http://schemas.microsoft.com/office/drawing/2014/main" id="{D78AEFAE-A5DC-4C23-9143-B159B1620FD5}"/>
+                <a16:creationId xmlns:a16="http://schemas.microsoft.com/office/drawing/2014/main" id="{103F9106-2109-49F6-A116-541648A3A88E}"/>
               </a:ext>
             </a:extLst>
           </p:cNvPr>
@@ -1931,7 +1931,7 @@
           <p:cNvPr id="3" name="">
             <a:extLst xmlns:a="http://schemas.openxmlformats.org/drawingml/2006/main">
               <a:ext uri="{FF2B5EF4-FFF2-40B4-BE49-F238E27FC236}">
-                <a16:creationId xmlns:a16="http://schemas.microsoft.com/office/drawing/2014/main" id="{059B0572-2C6E-4937-BA87-39A081B53492}"/>
+                <a16:creationId xmlns:a16="http://schemas.microsoft.com/office/drawing/2014/main" id="{DF59BC08-77E5-4714-B2D0-09A68AF2AA22}"/>
               </a:ext>
             </a:extLst>
           </p:cNvPr>
@@ -1965,7 +1965,7 @@
           <p:cNvPr id="4" name="">
             <a:extLst xmlns:a="http://schemas.openxmlformats.org/drawingml/2006/main">
               <a:ext uri="{FF2B5EF4-FFF2-40B4-BE49-F238E27FC236}">
-                <a16:creationId xmlns:a16="http://schemas.microsoft.com/office/drawing/2014/main" id="{A7E986C9-3E89-4B45-9EBD-4FDEA80FF837}"/>
+                <a16:creationId xmlns:a16="http://schemas.microsoft.com/office/drawing/2014/main" id="{78184A74-B377-40AE-B567-FCD6DB3D8245}"/>
               </a:ext>
             </a:extLst>
           </p:cNvPr>
@@ -2022,7 +2022,7 @@
           <p:cNvPr id="5" name="">
             <a:extLst xmlns:a="http://schemas.openxmlformats.org/drawingml/2006/main">
               <a:ext uri="{FF2B5EF4-FFF2-40B4-BE49-F238E27FC236}">
-                <a16:creationId xmlns:a16="http://schemas.microsoft.com/office/drawing/2014/main" id="{2DAC066B-3DBC-46C6-923A-3AFF124D6EB5}"/>
+                <a16:creationId xmlns:a16="http://schemas.microsoft.com/office/drawing/2014/main" id="{0EC2E89A-82A7-4394-9A04-4CA7038E1EA8}"/>
               </a:ext>
             </a:extLst>
           </p:cNvPr>
@@ -2079,7 +2079,7 @@
           <p:cNvPr id="6" name="">
             <a:extLst xmlns:a="http://schemas.openxmlformats.org/drawingml/2006/main">
               <a:ext uri="{FF2B5EF4-FFF2-40B4-BE49-F238E27FC236}">
-                <a16:creationId xmlns:a16="http://schemas.microsoft.com/office/drawing/2014/main" id="{675A53D2-2EE5-47BF-B689-5A69C3152B00}"/>
+                <a16:creationId xmlns:a16="http://schemas.microsoft.com/office/drawing/2014/main" id="{DC0C52E4-A8A0-4969-AC21-9C5E7857D95E}"/>
               </a:ext>
             </a:extLst>
           </p:cNvPr>
@@ -2113,7 +2113,7 @@
           <p:cNvPr id="7" name="">
             <a:extLst xmlns:a="http://schemas.openxmlformats.org/drawingml/2006/main">
               <a:ext uri="{FF2B5EF4-FFF2-40B4-BE49-F238E27FC236}">
-                <a16:creationId xmlns:a16="http://schemas.microsoft.com/office/drawing/2014/main" id="{A9E94D6F-2A7C-4214-A381-F83E30E0C520}"/>
+                <a16:creationId xmlns:a16="http://schemas.microsoft.com/office/drawing/2014/main" id="{4065C547-F84F-4327-B535-D50808C2B235}"/>
               </a:ext>
             </a:extLst>
           </p:cNvPr>
@@ -2170,7 +2170,7 @@
           <p:cNvPr id="8" name="">
             <a:extLst xmlns:a="http://schemas.openxmlformats.org/drawingml/2006/main">
               <a:ext uri="{FF2B5EF4-FFF2-40B4-BE49-F238E27FC236}">
-                <a16:creationId xmlns:a16="http://schemas.microsoft.com/office/drawing/2014/main" id="{BE12CBD6-CD0B-4FE9-8524-A1DD33DA60A3}"/>
+                <a16:creationId xmlns:a16="http://schemas.microsoft.com/office/drawing/2014/main" id="{40BDC3F3-63B6-4153-8F86-9F2C03ED6E29}"/>
               </a:ext>
             </a:extLst>
           </p:cNvPr>
@@ -2227,7 +2227,7 @@
           <p:cNvPr id="9" name="">
             <a:extLst xmlns:a="http://schemas.openxmlformats.org/drawingml/2006/main">
               <a:ext uri="{FF2B5EF4-FFF2-40B4-BE49-F238E27FC236}">
-                <a16:creationId xmlns:a16="http://schemas.microsoft.com/office/drawing/2014/main" id="{65272794-3438-4AA9-A2FA-8EAC4B6C5863}"/>
+                <a16:creationId xmlns:a16="http://schemas.microsoft.com/office/drawing/2014/main" id="{00E2FA93-5AD2-4BA6-9A9C-82257085FDBC}"/>
               </a:ext>
             </a:extLst>
           </p:cNvPr>
@@ -2284,7 +2284,7 @@
           <p:cNvPr id="10" name="">
             <a:extLst xmlns:a="http://schemas.openxmlformats.org/drawingml/2006/main">
               <a:ext uri="{FF2B5EF4-FFF2-40B4-BE49-F238E27FC236}">
-                <a16:creationId xmlns:a16="http://schemas.microsoft.com/office/drawing/2014/main" id="{639FE0B6-5229-41D5-B413-11AA81401740}"/>
+                <a16:creationId xmlns:a16="http://schemas.microsoft.com/office/drawing/2014/main" id="{00DFD4B5-CE3B-4683-A30C-3729033DE0FD}"/>
               </a:ext>
             </a:extLst>
           </p:cNvPr>
@@ -2341,7 +2341,7 @@
           <p:cNvPr id="11" name="">
             <a:extLst xmlns:a="http://schemas.openxmlformats.org/drawingml/2006/main">
               <a:ext uri="{FF2B5EF4-FFF2-40B4-BE49-F238E27FC236}">
-                <a16:creationId xmlns:a16="http://schemas.microsoft.com/office/drawing/2014/main" id="{C5ACDA21-8F60-4ED5-A3F8-970CA5386104}"/>
+                <a16:creationId xmlns:a16="http://schemas.microsoft.com/office/drawing/2014/main" id="{753E1DD1-908E-4F08-833A-8BB518BDED6D}"/>
               </a:ext>
             </a:extLst>
           </p:cNvPr>
@@ -2396,7 +2396,7 @@
     </p:spTree>
     <p:extLst>
       <p:ext uri="{BB962C8B-B14F-4D97-AF65-F5344CB8AC3E}">
-        <p14:creationId xmlns:p14="http://schemas.microsoft.com/office/powerpoint/2010/main" val="1167817566"/>
+        <p14:creationId xmlns:p14="http://schemas.microsoft.com/office/powerpoint/2010/main" val="1368409726"/>
       </p:ext>
     </p:extLst>
   </p:cSld>
@@ -2427,7 +2427,7 @@
           <p:cNvPr id="14" name="">
             <a:extLst xmlns:a="http://schemas.openxmlformats.org/drawingml/2006/main">
               <a:ext uri="{FF2B5EF4-FFF2-40B4-BE49-F238E27FC236}">
-                <a16:creationId xmlns:a16="http://schemas.microsoft.com/office/drawing/2014/main" id="{D8638898-6406-459F-B4DA-472EF34B88DC}"/>
+                <a16:creationId xmlns:a16="http://schemas.microsoft.com/office/drawing/2014/main" id="{62A17C16-99CD-41CB-B389-F9A52D54FEC1}"/>
               </a:ext>
             </a:extLst>
           </p:cNvPr>
@@ -2459,7 +2459,7 @@
           <p:cNvPr id="2" name="">
             <a:extLst xmlns:a="http://schemas.openxmlformats.org/drawingml/2006/main">
               <a:ext uri="{FF2B5EF4-FFF2-40B4-BE49-F238E27FC236}">
-                <a16:creationId xmlns:a16="http://schemas.microsoft.com/office/drawing/2014/main" id="{97AB4754-1265-4213-B848-B28FD76FDA47}"/>
+                <a16:creationId xmlns:a16="http://schemas.microsoft.com/office/drawing/2014/main" id="{B08AFF0C-92C4-4BDA-B672-6A9A79C9ECD3}"/>
               </a:ext>
             </a:extLst>
           </p:cNvPr>
@@ -2516,7 +2516,7 @@
           <p:cNvPr id="3" name="">
             <a:extLst xmlns:a="http://schemas.openxmlformats.org/drawingml/2006/main">
               <a:ext uri="{FF2B5EF4-FFF2-40B4-BE49-F238E27FC236}">
-                <a16:creationId xmlns:a16="http://schemas.microsoft.com/office/drawing/2014/main" id="{8F1EC84D-4C7C-4067-B871-D9D03282D166}"/>
+                <a16:creationId xmlns:a16="http://schemas.microsoft.com/office/drawing/2014/main" id="{C8009EEA-2373-4BD5-814C-2681C7CA2902}"/>
               </a:ext>
             </a:extLst>
           </p:cNvPr>
@@ -2548,7 +2548,7 @@
           <p:cNvPr id="4" name="">
             <a:extLst xmlns:a="http://schemas.openxmlformats.org/drawingml/2006/main">
               <a:ext uri="{FF2B5EF4-FFF2-40B4-BE49-F238E27FC236}">
-                <a16:creationId xmlns:a16="http://schemas.microsoft.com/office/drawing/2014/main" id="{BBDB2D7F-82CD-4EA9-9BCC-D5616E4BAAAD}"/>
+                <a16:creationId xmlns:a16="http://schemas.microsoft.com/office/drawing/2014/main" id="{76BBEBA8-E20F-4AD2-8C48-507F478003F5}"/>
               </a:ext>
             </a:extLst>
           </p:cNvPr>
@@ -2605,7 +2605,7 @@
           <p:cNvPr id="5" name="">
             <a:extLst xmlns:a="http://schemas.openxmlformats.org/drawingml/2006/main">
               <a:ext uri="{FF2B5EF4-FFF2-40B4-BE49-F238E27FC236}">
-                <a16:creationId xmlns:a16="http://schemas.microsoft.com/office/drawing/2014/main" id="{B852F6E5-961A-4D06-A236-B1723AB1ACC9}"/>
+                <a16:creationId xmlns:a16="http://schemas.microsoft.com/office/drawing/2014/main" id="{DBED4E48-CD2A-46A5-A1D3-CD7ED8E427B0}"/>
               </a:ext>
             </a:extLst>
           </p:cNvPr>
@@ -2662,7 +2662,7 @@
           <p:cNvPr id="6" name="">
             <a:extLst xmlns:a="http://schemas.openxmlformats.org/drawingml/2006/main">
               <a:ext uri="{FF2B5EF4-FFF2-40B4-BE49-F238E27FC236}">
-                <a16:creationId xmlns:a16="http://schemas.microsoft.com/office/drawing/2014/main" id="{7CC099D9-81DC-4403-B1E7-C3263E17988E}"/>
+                <a16:creationId xmlns:a16="http://schemas.microsoft.com/office/drawing/2014/main" id="{8A477833-4A55-463B-8FF2-90486BCECE0E}"/>
               </a:ext>
             </a:extLst>
           </p:cNvPr>
@@ -2719,7 +2719,7 @@
           <p:cNvPr id="7" name="">
             <a:extLst xmlns:a="http://schemas.openxmlformats.org/drawingml/2006/main">
               <a:ext uri="{FF2B5EF4-FFF2-40B4-BE49-F238E27FC236}">
-                <a16:creationId xmlns:a16="http://schemas.microsoft.com/office/drawing/2014/main" id="{8A704C47-03B6-4F75-9C07-6A2F5FCC271D}"/>
+                <a16:creationId xmlns:a16="http://schemas.microsoft.com/office/drawing/2014/main" id="{2A8E4105-9B8F-4462-931F-89741366F8EC}"/>
               </a:ext>
             </a:extLst>
           </p:cNvPr>
@@ -2751,7 +2751,7 @@
           <p:cNvPr id="8" name="">
             <a:extLst xmlns:a="http://schemas.openxmlformats.org/drawingml/2006/main">
               <a:ext uri="{FF2B5EF4-FFF2-40B4-BE49-F238E27FC236}">
-                <a16:creationId xmlns:a16="http://schemas.microsoft.com/office/drawing/2014/main" id="{BCEA6615-559B-433A-831A-63C826F472D6}"/>
+                <a16:creationId xmlns:a16="http://schemas.microsoft.com/office/drawing/2014/main" id="{276B4942-384B-4C29-A0D1-E48A7611A447}"/>
               </a:ext>
             </a:extLst>
           </p:cNvPr>
@@ -2808,7 +2808,7 @@
           <p:cNvPr id="9" name="">
             <a:extLst xmlns:a="http://schemas.openxmlformats.org/drawingml/2006/main">
               <a:ext uri="{FF2B5EF4-FFF2-40B4-BE49-F238E27FC236}">
-                <a16:creationId xmlns:a16="http://schemas.microsoft.com/office/drawing/2014/main" id="{323AF740-423B-48D4-B617-5CBDDFB46A21}"/>
+                <a16:creationId xmlns:a16="http://schemas.microsoft.com/office/drawing/2014/main" id="{6F862CB8-7732-4401-9487-2CB46C2C7CE7}"/>
               </a:ext>
             </a:extLst>
           </p:cNvPr>
@@ -2865,7 +2865,7 @@
           <p:cNvPr id="10" name="">
             <a:extLst xmlns:a="http://schemas.openxmlformats.org/drawingml/2006/main">
               <a:ext uri="{FF2B5EF4-FFF2-40B4-BE49-F238E27FC236}">
-                <a16:creationId xmlns:a16="http://schemas.microsoft.com/office/drawing/2014/main" id="{310371E5-42BF-46A9-9CE5-52C1F41BBD71}"/>
+                <a16:creationId xmlns:a16="http://schemas.microsoft.com/office/drawing/2014/main" id="{B31B8C6F-4A7B-40FC-B01D-84329F17FB75}"/>
               </a:ext>
             </a:extLst>
           </p:cNvPr>
@@ -2922,7 +2922,7 @@
           <p:cNvPr id="11" name="">
             <a:extLst xmlns:a="http://schemas.openxmlformats.org/drawingml/2006/main">
               <a:ext uri="{FF2B5EF4-FFF2-40B4-BE49-F238E27FC236}">
-                <a16:creationId xmlns:a16="http://schemas.microsoft.com/office/drawing/2014/main" id="{553C7EF5-08CA-4EAF-9861-C19146EA6B1D}"/>
+                <a16:creationId xmlns:a16="http://schemas.microsoft.com/office/drawing/2014/main" id="{2A83D0DF-A68D-4151-B606-1276D5E3DC0A}"/>
               </a:ext>
             </a:extLst>
           </p:cNvPr>
@@ -2979,7 +2979,7 @@
           <p:cNvPr id="12" name="">
             <a:extLst xmlns:a="http://schemas.openxmlformats.org/drawingml/2006/main">
               <a:ext uri="{FF2B5EF4-FFF2-40B4-BE49-F238E27FC236}">
-                <a16:creationId xmlns:a16="http://schemas.microsoft.com/office/drawing/2014/main" id="{48FCE87C-1E71-4173-94F1-389EE3EB8CB5}"/>
+                <a16:creationId xmlns:a16="http://schemas.microsoft.com/office/drawing/2014/main" id="{423AFFDB-F669-40A2-8328-5F6FAC272BC7}"/>
               </a:ext>
             </a:extLst>
           </p:cNvPr>
@@ -3036,7 +3036,7 @@
           <p:cNvPr id="13" name="">
             <a:extLst xmlns:a="http://schemas.openxmlformats.org/drawingml/2006/main">
               <a:ext uri="{FF2B5EF4-FFF2-40B4-BE49-F238E27FC236}">
-                <a16:creationId xmlns:a16="http://schemas.microsoft.com/office/drawing/2014/main" id="{FCE66C35-094D-4A52-8A8C-6A418A3D8B9D}"/>
+                <a16:creationId xmlns:a16="http://schemas.microsoft.com/office/drawing/2014/main" id="{186EFE5C-BBF5-4646-B86D-B43DC94D0737}"/>
               </a:ext>
             </a:extLst>
           </p:cNvPr>
@@ -3091,7 +3091,7 @@
     </p:spTree>
     <p:extLst>
       <p:ext uri="{BB962C8B-B14F-4D97-AF65-F5344CB8AC3E}">
-        <p14:creationId xmlns:p14="http://schemas.microsoft.com/office/powerpoint/2010/main" val="1789742798"/>
+        <p14:creationId xmlns:p14="http://schemas.microsoft.com/office/powerpoint/2010/main" val="1689615633"/>
       </p:ext>
     </p:extLst>
   </p:cSld>
@@ -3292,7 +3292,7 @@
           <p:cNvPr id="19" name="">
             <a:extLst xmlns:a="http://schemas.openxmlformats.org/drawingml/2006/main">
               <a:ext uri="{FF2B5EF4-FFF2-40B4-BE49-F238E27FC236}">
-                <a16:creationId xmlns:a16="http://schemas.microsoft.com/office/drawing/2014/main" id="{5F38428B-4345-4B13-ACB0-B4B7D68ADA93}"/>
+                <a16:creationId xmlns:a16="http://schemas.microsoft.com/office/drawing/2014/main" id="{6C0146A7-9CE7-43DB-B87B-6838E959D6C7}"/>
               </a:ext>
             </a:extLst>
           </p:cNvPr>
@@ -3324,7 +3324,7 @@
           <p:cNvPr id="2" name="">
             <a:extLst xmlns:a="http://schemas.openxmlformats.org/drawingml/2006/main">
               <a:ext uri="{FF2B5EF4-FFF2-40B4-BE49-F238E27FC236}">
-                <a16:creationId xmlns:a16="http://schemas.microsoft.com/office/drawing/2014/main" id="{1F553197-116C-44D1-8BD9-8051E11DFE9E}"/>
+                <a16:creationId xmlns:a16="http://schemas.microsoft.com/office/drawing/2014/main" id="{9D06CB2A-C9C5-49C3-B28E-AB90C5DB3A6A}"/>
               </a:ext>
             </a:extLst>
           </p:cNvPr>
@@ -3381,7 +3381,7 @@
           <p:cNvPr id="3" name="">
             <a:extLst xmlns:a="http://schemas.openxmlformats.org/drawingml/2006/main">
               <a:ext uri="{FF2B5EF4-FFF2-40B4-BE49-F238E27FC236}">
-                <a16:creationId xmlns:a16="http://schemas.microsoft.com/office/drawing/2014/main" id="{222CB85D-F232-4DF5-B047-5E28F3ED9541}"/>
+                <a16:creationId xmlns:a16="http://schemas.microsoft.com/office/drawing/2014/main" id="{3F3651D6-E969-4634-A2EE-BE6A35B186B9}"/>
               </a:ext>
             </a:extLst>
           </p:cNvPr>
@@ -3413,7 +3413,7 @@
           <p:cNvPr id="4" name="">
             <a:extLst xmlns:a="http://schemas.openxmlformats.org/drawingml/2006/main">
               <a:ext uri="{FF2B5EF4-FFF2-40B4-BE49-F238E27FC236}">
-                <a16:creationId xmlns:a16="http://schemas.microsoft.com/office/drawing/2014/main" id="{165B987E-E73A-41C5-AD5F-82FE69695602}"/>
+                <a16:creationId xmlns:a16="http://schemas.microsoft.com/office/drawing/2014/main" id="{64B46192-9647-416A-A6DA-6F9B5775DB76}"/>
               </a:ext>
             </a:extLst>
           </p:cNvPr>
@@ -3470,7 +3470,7 @@
           <p:cNvPr id="5" name="">
             <a:extLst xmlns:a="http://schemas.openxmlformats.org/drawingml/2006/main">
               <a:ext uri="{FF2B5EF4-FFF2-40B4-BE49-F238E27FC236}">
-                <a16:creationId xmlns:a16="http://schemas.microsoft.com/office/drawing/2014/main" id="{68BF94AE-3D87-42E5-805C-E0DF48EC346E}"/>
+                <a16:creationId xmlns:a16="http://schemas.microsoft.com/office/drawing/2014/main" id="{135510FF-2DB7-41F9-9D27-17CE34BF2F86}"/>
               </a:ext>
             </a:extLst>
           </p:cNvPr>
@@ -3527,7 +3527,7 @@
           <p:cNvPr id="6" name="">
             <a:extLst xmlns:a="http://schemas.openxmlformats.org/drawingml/2006/main">
               <a:ext uri="{FF2B5EF4-FFF2-40B4-BE49-F238E27FC236}">
-                <a16:creationId xmlns:a16="http://schemas.microsoft.com/office/drawing/2014/main" id="{4F99BA6C-AF0C-4358-8163-7F77E55A4E94}"/>
+                <a16:creationId xmlns:a16="http://schemas.microsoft.com/office/drawing/2014/main" id="{AC40F335-EA79-4E80-AA19-DDF0727AF48F}"/>
               </a:ext>
             </a:extLst>
           </p:cNvPr>
@@ -3584,7 +3584,7 @@
           <p:cNvPr id="7" name="">
             <a:extLst xmlns:a="http://schemas.openxmlformats.org/drawingml/2006/main">
               <a:ext uri="{FF2B5EF4-FFF2-40B4-BE49-F238E27FC236}">
-                <a16:creationId xmlns:a16="http://schemas.microsoft.com/office/drawing/2014/main" id="{B3ECEFD4-7D4A-4AEA-B796-7C06D694438E}"/>
+                <a16:creationId xmlns:a16="http://schemas.microsoft.com/office/drawing/2014/main" id="{27DCC6E0-2485-43C5-8931-C89FA945C9BD}"/>
               </a:ext>
             </a:extLst>
           </p:cNvPr>
@@ -3616,7 +3616,7 @@
           <p:cNvPr id="8" name="">
             <a:extLst xmlns:a="http://schemas.openxmlformats.org/drawingml/2006/main">
               <a:ext uri="{FF2B5EF4-FFF2-40B4-BE49-F238E27FC236}">
-                <a16:creationId xmlns:a16="http://schemas.microsoft.com/office/drawing/2014/main" id="{0548D648-09E1-4D92-99B0-4A8ED8B89569}"/>
+                <a16:creationId xmlns:a16="http://schemas.microsoft.com/office/drawing/2014/main" id="{2897D060-A367-44AC-BB87-5816C6C59664}"/>
               </a:ext>
             </a:extLst>
           </p:cNvPr>
@@ -3673,7 +3673,7 @@
           <p:cNvPr id="9" name="">
             <a:extLst xmlns:a="http://schemas.openxmlformats.org/drawingml/2006/main">
               <a:ext uri="{FF2B5EF4-FFF2-40B4-BE49-F238E27FC236}">
-                <a16:creationId xmlns:a16="http://schemas.microsoft.com/office/drawing/2014/main" id="{0C2CE5FD-1B96-43E8-AB0B-D4589DDAB53E}"/>
+                <a16:creationId xmlns:a16="http://schemas.microsoft.com/office/drawing/2014/main" id="{9FE032D9-D649-4DED-ABF9-03A82A7782B6}"/>
               </a:ext>
             </a:extLst>
           </p:cNvPr>
@@ -3730,7 +3730,7 @@
           <p:cNvPr id="10" name="">
             <a:extLst xmlns:a="http://schemas.openxmlformats.org/drawingml/2006/main">
               <a:ext uri="{FF2B5EF4-FFF2-40B4-BE49-F238E27FC236}">
-                <a16:creationId xmlns:a16="http://schemas.microsoft.com/office/drawing/2014/main" id="{161220DF-8AE3-48D5-8E7A-DD37ACDA6257}"/>
+                <a16:creationId xmlns:a16="http://schemas.microsoft.com/office/drawing/2014/main" id="{AEBD4D2A-CCF2-4217-88A1-CAEA5D3CD4DD}"/>
               </a:ext>
             </a:extLst>
           </p:cNvPr>
@@ -3787,7 +3787,7 @@
           <p:cNvPr id="11" name="">
             <a:extLst xmlns:a="http://schemas.openxmlformats.org/drawingml/2006/main">
               <a:ext uri="{FF2B5EF4-FFF2-40B4-BE49-F238E27FC236}">
-                <a16:creationId xmlns:a16="http://schemas.microsoft.com/office/drawing/2014/main" id="{FC9EDC32-72EC-4F36-A365-34710199D3C5}"/>
+                <a16:creationId xmlns:a16="http://schemas.microsoft.com/office/drawing/2014/main" id="{A9D8E58F-1573-42F1-A15B-3D88EF50A5B6}"/>
               </a:ext>
             </a:extLst>
           </p:cNvPr>
@@ -3821,7 +3821,7 @@
           <p:cNvPr id="12" name="">
             <a:extLst xmlns:a="http://schemas.openxmlformats.org/drawingml/2006/main">
               <a:ext uri="{FF2B5EF4-FFF2-40B4-BE49-F238E27FC236}">
-                <a16:creationId xmlns:a16="http://schemas.microsoft.com/office/drawing/2014/main" id="{3F5EE45B-E381-4215-9B20-A4BE7BBBDC66}"/>
+                <a16:creationId xmlns:a16="http://schemas.microsoft.com/office/drawing/2014/main" id="{E2A2422C-FFC4-486A-9FFE-3599D3820309}"/>
               </a:ext>
             </a:extLst>
           </p:cNvPr>
@@ -3878,7 +3878,7 @@
           <p:cNvPr id="13" name="">
             <a:extLst xmlns:a="http://schemas.openxmlformats.org/drawingml/2006/main">
               <a:ext uri="{FF2B5EF4-FFF2-40B4-BE49-F238E27FC236}">
-                <a16:creationId xmlns:a16="http://schemas.microsoft.com/office/drawing/2014/main" id="{397BCCF2-768F-4901-859F-E1D96E3DF752}"/>
+                <a16:creationId xmlns:a16="http://schemas.microsoft.com/office/drawing/2014/main" id="{2935949F-508D-4BBC-AA98-11417D128EB8}"/>
               </a:ext>
             </a:extLst>
           </p:cNvPr>
@@ -3935,7 +3935,7 @@
           <p:cNvPr id="14" name="">
             <a:extLst xmlns:a="http://schemas.openxmlformats.org/drawingml/2006/main">
               <a:ext uri="{FF2B5EF4-FFF2-40B4-BE49-F238E27FC236}">
-                <a16:creationId xmlns:a16="http://schemas.microsoft.com/office/drawing/2014/main" id="{40FA9DFB-E453-41B5-88B6-BA3A5A6A66BB}"/>
+                <a16:creationId xmlns:a16="http://schemas.microsoft.com/office/drawing/2014/main" id="{5735ADE9-8B3F-468C-9641-E982D86FAC4A}"/>
               </a:ext>
             </a:extLst>
           </p:cNvPr>
@@ -3992,7 +3992,7 @@
           <p:cNvPr id="15" name="">
             <a:extLst xmlns:a="http://schemas.openxmlformats.org/drawingml/2006/main">
               <a:ext uri="{FF2B5EF4-FFF2-40B4-BE49-F238E27FC236}">
-                <a16:creationId xmlns:a16="http://schemas.microsoft.com/office/drawing/2014/main" id="{5F7FCCD0-E9FD-4E32-A686-3F8DEE6D2607}"/>
+                <a16:creationId xmlns:a16="http://schemas.microsoft.com/office/drawing/2014/main" id="{FED31CDF-549C-4C86-867B-02AF72C93FD2}"/>
               </a:ext>
             </a:extLst>
           </p:cNvPr>
@@ -4026,7 +4026,7 @@
           <p:cNvPr id="16" name="">
             <a:extLst xmlns:a="http://schemas.openxmlformats.org/drawingml/2006/main">
               <a:ext uri="{FF2B5EF4-FFF2-40B4-BE49-F238E27FC236}">
-                <a16:creationId xmlns:a16="http://schemas.microsoft.com/office/drawing/2014/main" id="{9F25A176-90D4-4F5B-9B55-6F75AA876984}"/>
+                <a16:creationId xmlns:a16="http://schemas.microsoft.com/office/drawing/2014/main" id="{D77A22A4-341A-49E5-A17F-9A53631B1B60}"/>
               </a:ext>
             </a:extLst>
           </p:cNvPr>
@@ -4083,7 +4083,7 @@
           <p:cNvPr id="17" name="">
             <a:extLst xmlns:a="http://schemas.openxmlformats.org/drawingml/2006/main">
               <a:ext uri="{FF2B5EF4-FFF2-40B4-BE49-F238E27FC236}">
-                <a16:creationId xmlns:a16="http://schemas.microsoft.com/office/drawing/2014/main" id="{5A027A2B-3B3F-4472-982B-C8FDA49106E3}"/>
+                <a16:creationId xmlns:a16="http://schemas.microsoft.com/office/drawing/2014/main" id="{A8951EC6-126B-4F6C-AE47-0B5F3178DF63}"/>
               </a:ext>
             </a:extLst>
           </p:cNvPr>
@@ -4140,7 +4140,7 @@
           <p:cNvPr id="18" name="">
             <a:extLst xmlns:a="http://schemas.openxmlformats.org/drawingml/2006/main">
               <a:ext uri="{FF2B5EF4-FFF2-40B4-BE49-F238E27FC236}">
-                <a16:creationId xmlns:a16="http://schemas.microsoft.com/office/drawing/2014/main" id="{9BF126DB-829E-4BFC-A903-B28D0B85D6D7}"/>
+                <a16:creationId xmlns:a16="http://schemas.microsoft.com/office/drawing/2014/main" id="{41D01A85-1AC7-44F8-BCED-78EDCAD9176A}"/>
               </a:ext>
             </a:extLst>
           </p:cNvPr>
@@ -4195,7 +4195,7 @@
     </p:spTree>
     <p:extLst>
       <p:ext uri="{BB962C8B-B14F-4D97-AF65-F5344CB8AC3E}">
-        <p14:creationId xmlns:p14="http://schemas.microsoft.com/office/powerpoint/2010/main" val="2062990813"/>
+        <p14:creationId xmlns:p14="http://schemas.microsoft.com/office/powerpoint/2010/main" val="797222777"/>
       </p:ext>
     </p:extLst>
   </p:cSld>
@@ -4350,7 +4350,7 @@
           <p:cNvPr id="23" name="">
             <a:extLst xmlns:a="http://schemas.openxmlformats.org/drawingml/2006/main">
               <a:ext uri="{FF2B5EF4-FFF2-40B4-BE49-F238E27FC236}">
-                <a16:creationId xmlns:a16="http://schemas.microsoft.com/office/drawing/2014/main" id="{BBBCFC18-F62B-4BC7-9A40-2F3BF88B3826}"/>
+                <a16:creationId xmlns:a16="http://schemas.microsoft.com/office/drawing/2014/main" id="{14685E8D-F203-4B9D-935C-E76938CD8631}"/>
               </a:ext>
             </a:extLst>
           </p:cNvPr>
@@ -4382,7 +4382,7 @@
           <p:cNvPr id="2" name="">
             <a:extLst xmlns:a="http://schemas.openxmlformats.org/drawingml/2006/main">
               <a:ext uri="{FF2B5EF4-FFF2-40B4-BE49-F238E27FC236}">
-                <a16:creationId xmlns:a16="http://schemas.microsoft.com/office/drawing/2014/main" id="{EBBEACD4-B3D4-4576-95EF-C4C1B02D19FF}"/>
+                <a16:creationId xmlns:a16="http://schemas.microsoft.com/office/drawing/2014/main" id="{6D2F3474-E5BF-4B96-9728-65A9DAD22F2A}"/>
               </a:ext>
             </a:extLst>
           </p:cNvPr>
@@ -4439,7 +4439,7 @@
           <p:cNvPr id="3" name="">
             <a:extLst xmlns:a="http://schemas.openxmlformats.org/drawingml/2006/main">
               <a:ext uri="{FF2B5EF4-FFF2-40B4-BE49-F238E27FC236}">
-                <a16:creationId xmlns:a16="http://schemas.microsoft.com/office/drawing/2014/main" id="{D015F2F0-1356-420F-AB71-93A50B79FBB6}"/>
+                <a16:creationId xmlns:a16="http://schemas.microsoft.com/office/drawing/2014/main" id="{6CD40C85-20BB-4C46-A69C-4C676B02FFD9}"/>
               </a:ext>
             </a:extLst>
           </p:cNvPr>
@@ -4471,7 +4471,7 @@
           <p:cNvPr id="4" name="">
             <a:extLst xmlns:a="http://schemas.openxmlformats.org/drawingml/2006/main">
               <a:ext uri="{FF2B5EF4-FFF2-40B4-BE49-F238E27FC236}">
-                <a16:creationId xmlns:a16="http://schemas.microsoft.com/office/drawing/2014/main" id="{3E0FFB73-B1D2-4932-A739-B2431692B7A7}"/>
+                <a16:creationId xmlns:a16="http://schemas.microsoft.com/office/drawing/2014/main" id="{C9AC97C5-65B0-46D3-AE62-D05134E8027D}"/>
               </a:ext>
             </a:extLst>
           </p:cNvPr>
@@ -4528,7 +4528,7 @@
           <p:cNvPr id="5" name="">
             <a:extLst xmlns:a="http://schemas.openxmlformats.org/drawingml/2006/main">
               <a:ext uri="{FF2B5EF4-FFF2-40B4-BE49-F238E27FC236}">
-                <a16:creationId xmlns:a16="http://schemas.microsoft.com/office/drawing/2014/main" id="{FB2498F5-6F97-42B9-983E-9AD904FF7F1E}"/>
+                <a16:creationId xmlns:a16="http://schemas.microsoft.com/office/drawing/2014/main" id="{C7AE8B90-B5E9-4F64-8957-79D64B66AAE6}"/>
               </a:ext>
             </a:extLst>
           </p:cNvPr>
@@ -4585,7 +4585,7 @@
           <p:cNvPr id="6" name="">
             <a:extLst xmlns:a="http://schemas.openxmlformats.org/drawingml/2006/main">
               <a:ext uri="{FF2B5EF4-FFF2-40B4-BE49-F238E27FC236}">
-                <a16:creationId xmlns:a16="http://schemas.microsoft.com/office/drawing/2014/main" id="{BF11D0F9-9EEE-4B1A-8EA5-C3FAA586585D}"/>
+                <a16:creationId xmlns:a16="http://schemas.microsoft.com/office/drawing/2014/main" id="{FD9259B7-8D6C-4A34-8BBB-D35CDEFF4985}"/>
               </a:ext>
             </a:extLst>
           </p:cNvPr>
@@ -4642,7 +4642,7 @@
           <p:cNvPr id="7" name="">
             <a:extLst xmlns:a="http://schemas.openxmlformats.org/drawingml/2006/main">
               <a:ext uri="{FF2B5EF4-FFF2-40B4-BE49-F238E27FC236}">
-                <a16:creationId xmlns:a16="http://schemas.microsoft.com/office/drawing/2014/main" id="{C7DA9FFC-E8B3-4C50-8C42-D2CBABD31809}"/>
+                <a16:creationId xmlns:a16="http://schemas.microsoft.com/office/drawing/2014/main" id="{A1183358-0D5C-4F7F-AE4C-772A83259E58}"/>
               </a:ext>
             </a:extLst>
           </p:cNvPr>
@@ -4674,7 +4674,7 @@
           <p:cNvPr id="8" name="">
             <a:extLst xmlns:a="http://schemas.openxmlformats.org/drawingml/2006/main">
               <a:ext uri="{FF2B5EF4-FFF2-40B4-BE49-F238E27FC236}">
-                <a16:creationId xmlns:a16="http://schemas.microsoft.com/office/drawing/2014/main" id="{CBC5A155-4618-4D47-B566-871F92437640}"/>
+                <a16:creationId xmlns:a16="http://schemas.microsoft.com/office/drawing/2014/main" id="{FBFA8D65-75F7-41B1-BDB4-8F6F6E9315CD}"/>
               </a:ext>
             </a:extLst>
           </p:cNvPr>
@@ -4731,7 +4731,7 @@
           <p:cNvPr id="9" name="">
             <a:extLst xmlns:a="http://schemas.openxmlformats.org/drawingml/2006/main">
               <a:ext uri="{FF2B5EF4-FFF2-40B4-BE49-F238E27FC236}">
-                <a16:creationId xmlns:a16="http://schemas.microsoft.com/office/drawing/2014/main" id="{3F6FD950-6C65-4A8B-ACA7-EAD76452520D}"/>
+                <a16:creationId xmlns:a16="http://schemas.microsoft.com/office/drawing/2014/main" id="{184E0761-C201-4C77-BC2D-602F41534D53}"/>
               </a:ext>
             </a:extLst>
           </p:cNvPr>
@@ -4788,7 +4788,7 @@
           <p:cNvPr id="10" name="">
             <a:extLst xmlns:a="http://schemas.openxmlformats.org/drawingml/2006/main">
               <a:ext uri="{FF2B5EF4-FFF2-40B4-BE49-F238E27FC236}">
-                <a16:creationId xmlns:a16="http://schemas.microsoft.com/office/drawing/2014/main" id="{DF6E1D7D-498C-4B75-89F7-1A3EAC6573FB}"/>
+                <a16:creationId xmlns:a16="http://schemas.microsoft.com/office/drawing/2014/main" id="{D82B4011-D3C8-424B-9290-BEDCD0B3B651}"/>
               </a:ext>
             </a:extLst>
           </p:cNvPr>
@@ -4822,7 +4822,7 @@
           <p:cNvPr id="11" name="">
             <a:extLst xmlns:a="http://schemas.openxmlformats.org/drawingml/2006/main">
               <a:ext uri="{FF2B5EF4-FFF2-40B4-BE49-F238E27FC236}">
-                <a16:creationId xmlns:a16="http://schemas.microsoft.com/office/drawing/2014/main" id="{735B065E-D029-49F3-939A-FB1B5F2F1BBB}"/>
+                <a16:creationId xmlns:a16="http://schemas.microsoft.com/office/drawing/2014/main" id="{3F2BDC31-3868-409C-94B5-E1423EF2617A}"/>
               </a:ext>
             </a:extLst>
           </p:cNvPr>
@@ -4854,7 +4854,7 @@
           <p:cNvPr id="12" name="">
             <a:extLst xmlns:a="http://schemas.openxmlformats.org/drawingml/2006/main">
               <a:ext uri="{FF2B5EF4-FFF2-40B4-BE49-F238E27FC236}">
-                <a16:creationId xmlns:a16="http://schemas.microsoft.com/office/drawing/2014/main" id="{5B1B4111-9078-47ED-A63F-D50BD9E25FF3}"/>
+                <a16:creationId xmlns:a16="http://schemas.microsoft.com/office/drawing/2014/main" id="{07330AEE-2A3B-4E18-B8E1-6D0A2B913492}"/>
               </a:ext>
             </a:extLst>
           </p:cNvPr>
@@ -4911,7 +4911,7 @@
           <p:cNvPr id="13" name="">
             <a:extLst xmlns:a="http://schemas.openxmlformats.org/drawingml/2006/main">
               <a:ext uri="{FF2B5EF4-FFF2-40B4-BE49-F238E27FC236}">
-                <a16:creationId xmlns:a16="http://schemas.microsoft.com/office/drawing/2014/main" id="{F9C9BE43-E949-4B66-AC30-5DE04F783E40}"/>
+                <a16:creationId xmlns:a16="http://schemas.microsoft.com/office/drawing/2014/main" id="{F897F4D4-154C-40A8-BFAA-CE0EFE1D337B}"/>
               </a:ext>
             </a:extLst>
           </p:cNvPr>
@@ -4968,7 +4968,7 @@
           <p:cNvPr id="14" name="">
             <a:extLst xmlns:a="http://schemas.openxmlformats.org/drawingml/2006/main">
               <a:ext uri="{FF2B5EF4-FFF2-40B4-BE49-F238E27FC236}">
-                <a16:creationId xmlns:a16="http://schemas.microsoft.com/office/drawing/2014/main" id="{F46F561D-4AF8-4ED2-861B-8713EA7EB5A2}"/>
+                <a16:creationId xmlns:a16="http://schemas.microsoft.com/office/drawing/2014/main" id="{D69DAF1A-5114-468A-9320-372FE0956417}"/>
               </a:ext>
             </a:extLst>
           </p:cNvPr>
@@ -5002,7 +5002,7 @@
           <p:cNvPr id="15" name="">
             <a:extLst xmlns:a="http://schemas.openxmlformats.org/drawingml/2006/main">
               <a:ext uri="{FF2B5EF4-FFF2-40B4-BE49-F238E27FC236}">
-                <a16:creationId xmlns:a16="http://schemas.microsoft.com/office/drawing/2014/main" id="{CA20C191-073A-487A-99BC-0C67A12B3A60}"/>
+                <a16:creationId xmlns:a16="http://schemas.microsoft.com/office/drawing/2014/main" id="{638EBF81-55D8-478C-A6E9-76F5B2F08D56}"/>
               </a:ext>
             </a:extLst>
           </p:cNvPr>
@@ -5034,7 +5034,7 @@
           <p:cNvPr id="16" name="">
             <a:extLst xmlns:a="http://schemas.openxmlformats.org/drawingml/2006/main">
               <a:ext uri="{FF2B5EF4-FFF2-40B4-BE49-F238E27FC236}">
-                <a16:creationId xmlns:a16="http://schemas.microsoft.com/office/drawing/2014/main" id="{55A21E21-0F21-499B-A262-7DBCCA987846}"/>
+                <a16:creationId xmlns:a16="http://schemas.microsoft.com/office/drawing/2014/main" id="{F7011845-5147-4AA6-9181-C2742510A537}"/>
               </a:ext>
             </a:extLst>
           </p:cNvPr>
@@ -5091,7 +5091,7 @@
           <p:cNvPr id="17" name="">
             <a:extLst xmlns:a="http://schemas.openxmlformats.org/drawingml/2006/main">
               <a:ext uri="{FF2B5EF4-FFF2-40B4-BE49-F238E27FC236}">
-                <a16:creationId xmlns:a16="http://schemas.microsoft.com/office/drawing/2014/main" id="{85BF74A2-B7DE-4A4B-8662-5A65CEA4AB23}"/>
+                <a16:creationId xmlns:a16="http://schemas.microsoft.com/office/drawing/2014/main" id="{2EE40130-7A96-4671-9A61-5E86F48608E0}"/>
               </a:ext>
             </a:extLst>
           </p:cNvPr>
@@ -5148,7 +5148,7 @@
           <p:cNvPr id="18" name="">
             <a:extLst xmlns:a="http://schemas.openxmlformats.org/drawingml/2006/main">
               <a:ext uri="{FF2B5EF4-FFF2-40B4-BE49-F238E27FC236}">
-                <a16:creationId xmlns:a16="http://schemas.microsoft.com/office/drawing/2014/main" id="{0D0F9CD6-4444-4FE7-9D5D-E41583FE9A25}"/>
+                <a16:creationId xmlns:a16="http://schemas.microsoft.com/office/drawing/2014/main" id="{898B33B8-8129-4913-9DF5-5D6C10BEF07C}"/>
               </a:ext>
             </a:extLst>
           </p:cNvPr>
@@ -5182,7 +5182,7 @@
           <p:cNvPr id="19" name="">
             <a:extLst xmlns:a="http://schemas.openxmlformats.org/drawingml/2006/main">
               <a:ext uri="{FF2B5EF4-FFF2-40B4-BE49-F238E27FC236}">
-                <a16:creationId xmlns:a16="http://schemas.microsoft.com/office/drawing/2014/main" id="{41B70E01-C787-4629-BB8A-363A3BF87BF3}"/>
+                <a16:creationId xmlns:a16="http://schemas.microsoft.com/office/drawing/2014/main" id="{E5FB2BE3-97FA-4596-A2D3-AF57F1A4C90B}"/>
               </a:ext>
             </a:extLst>
           </p:cNvPr>
@@ -5214,7 +5214,7 @@
           <p:cNvPr id="20" name="">
             <a:extLst xmlns:a="http://schemas.openxmlformats.org/drawingml/2006/main">
               <a:ext uri="{FF2B5EF4-FFF2-40B4-BE49-F238E27FC236}">
-                <a16:creationId xmlns:a16="http://schemas.microsoft.com/office/drawing/2014/main" id="{EA897514-EF3B-4D84-B6E6-ED0307C96407}"/>
+                <a16:creationId xmlns:a16="http://schemas.microsoft.com/office/drawing/2014/main" id="{A9AC18C9-4170-4004-8CE8-E1F6B6E241EB}"/>
               </a:ext>
             </a:extLst>
           </p:cNvPr>
@@ -5271,7 +5271,7 @@
           <p:cNvPr id="21" name="">
             <a:extLst xmlns:a="http://schemas.openxmlformats.org/drawingml/2006/main">
               <a:ext uri="{FF2B5EF4-FFF2-40B4-BE49-F238E27FC236}">
-                <a16:creationId xmlns:a16="http://schemas.microsoft.com/office/drawing/2014/main" id="{A628339F-6CA9-47F2-B547-A260D6B85141}"/>
+                <a16:creationId xmlns:a16="http://schemas.microsoft.com/office/drawing/2014/main" id="{6152FE7B-A23C-4460-BB13-A7DC4C115620}"/>
               </a:ext>
             </a:extLst>
           </p:cNvPr>
@@ -5328,7 +5328,7 @@
           <p:cNvPr id="22" name="">
             <a:extLst xmlns:a="http://schemas.openxmlformats.org/drawingml/2006/main">
               <a:ext uri="{FF2B5EF4-FFF2-40B4-BE49-F238E27FC236}">
-                <a16:creationId xmlns:a16="http://schemas.microsoft.com/office/drawing/2014/main" id="{8C91AD82-8495-4868-96D2-6EF54F4E586C}"/>
+                <a16:creationId xmlns:a16="http://schemas.microsoft.com/office/drawing/2014/main" id="{BEF8B1FB-6179-4A20-9369-05655F59B4E2}"/>
               </a:ext>
             </a:extLst>
           </p:cNvPr>
@@ -5383,7 +5383,7 @@
     </p:spTree>
     <p:extLst>
       <p:ext uri="{BB962C8B-B14F-4D97-AF65-F5344CB8AC3E}">
-        <p14:creationId xmlns:p14="http://schemas.microsoft.com/office/powerpoint/2010/main" val="955925328"/>
+        <p14:creationId xmlns:p14="http://schemas.microsoft.com/office/powerpoint/2010/main" val="1220777991"/>
       </p:ext>
     </p:extLst>
   </p:cSld>
@@ -5584,7 +5584,7 @@
           <p:cNvPr id="23" name="">
             <a:extLst xmlns:a="http://schemas.openxmlformats.org/drawingml/2006/main">
               <a:ext uri="{FF2B5EF4-FFF2-40B4-BE49-F238E27FC236}">
-                <a16:creationId xmlns:a16="http://schemas.microsoft.com/office/drawing/2014/main" id="{2095A7F1-3382-44E1-96C5-28B6777F5855}"/>
+                <a16:creationId xmlns:a16="http://schemas.microsoft.com/office/drawing/2014/main" id="{A4BDAD2F-FE5E-4E8D-A507-3D996E7D109B}"/>
               </a:ext>
             </a:extLst>
           </p:cNvPr>
@@ -5616,7 +5616,7 @@
           <p:cNvPr id="2" name="">
             <a:extLst xmlns:a="http://schemas.openxmlformats.org/drawingml/2006/main">
               <a:ext uri="{FF2B5EF4-FFF2-40B4-BE49-F238E27FC236}">
-                <a16:creationId xmlns:a16="http://schemas.microsoft.com/office/drawing/2014/main" id="{ADFF7744-0507-48FC-8053-82D5340E8AC0}"/>
+                <a16:creationId xmlns:a16="http://schemas.microsoft.com/office/drawing/2014/main" id="{A041F1CE-DED3-4E9C-AE7A-6BC55C8E06A6}"/>
               </a:ext>
             </a:extLst>
           </p:cNvPr>
@@ -5673,7 +5673,7 @@
           <p:cNvPr id="3" name="">
             <a:extLst xmlns:a="http://schemas.openxmlformats.org/drawingml/2006/main">
               <a:ext uri="{FF2B5EF4-FFF2-40B4-BE49-F238E27FC236}">
-                <a16:creationId xmlns:a16="http://schemas.microsoft.com/office/drawing/2014/main" id="{D925303D-8C07-490C-9149-060B540A3C97}"/>
+                <a16:creationId xmlns:a16="http://schemas.microsoft.com/office/drawing/2014/main" id="{479CFD97-53DE-42F0-855C-E90C804D5F5C}"/>
               </a:ext>
             </a:extLst>
           </p:cNvPr>
@@ -5705,7 +5705,7 @@
           <p:cNvPr id="4" name="">
             <a:extLst xmlns:a="http://schemas.openxmlformats.org/drawingml/2006/main">
               <a:ext uri="{FF2B5EF4-FFF2-40B4-BE49-F238E27FC236}">
-                <a16:creationId xmlns:a16="http://schemas.microsoft.com/office/drawing/2014/main" id="{68F1F9E6-0EF0-41CE-8A97-33DFAD7AC9A2}"/>
+                <a16:creationId xmlns:a16="http://schemas.microsoft.com/office/drawing/2014/main" id="{F7D585CC-7816-4DC5-8730-170496B6DE53}"/>
               </a:ext>
             </a:extLst>
           </p:cNvPr>
@@ -5762,7 +5762,7 @@
           <p:cNvPr id="5" name="">
             <a:extLst xmlns:a="http://schemas.openxmlformats.org/drawingml/2006/main">
               <a:ext uri="{FF2B5EF4-FFF2-40B4-BE49-F238E27FC236}">
-                <a16:creationId xmlns:a16="http://schemas.microsoft.com/office/drawing/2014/main" id="{BCE5B686-CA12-4448-95D0-8F6592977A7A}"/>
+                <a16:creationId xmlns:a16="http://schemas.microsoft.com/office/drawing/2014/main" id="{E05C5581-7275-47B9-8A7E-1BC982231DDA}"/>
               </a:ext>
             </a:extLst>
           </p:cNvPr>
@@ -5819,7 +5819,7 @@
           <p:cNvPr id="6" name="">
             <a:extLst xmlns:a="http://schemas.openxmlformats.org/drawingml/2006/main">
               <a:ext uri="{FF2B5EF4-FFF2-40B4-BE49-F238E27FC236}">
-                <a16:creationId xmlns:a16="http://schemas.microsoft.com/office/drawing/2014/main" id="{9E0F9EC0-0CEB-43FC-9C5A-EBE6E74F1080}"/>
+                <a16:creationId xmlns:a16="http://schemas.microsoft.com/office/drawing/2014/main" id="{EAADB9F5-9AFA-49B2-9125-4E767A5300B0}"/>
               </a:ext>
             </a:extLst>
           </p:cNvPr>
@@ -5876,7 +5876,7 @@
           <p:cNvPr id="7" name="">
             <a:extLst xmlns:a="http://schemas.openxmlformats.org/drawingml/2006/main">
               <a:ext uri="{FF2B5EF4-FFF2-40B4-BE49-F238E27FC236}">
-                <a16:creationId xmlns:a16="http://schemas.microsoft.com/office/drawing/2014/main" id="{83B5A480-3452-4C0E-8E7D-F02909F41A4E}"/>
+                <a16:creationId xmlns:a16="http://schemas.microsoft.com/office/drawing/2014/main" id="{87BFD5D5-72D9-4A55-BACE-F5E045674395}"/>
               </a:ext>
             </a:extLst>
           </p:cNvPr>
@@ -5908,7 +5908,7 @@
           <p:cNvPr id="8" name="">
             <a:extLst xmlns:a="http://schemas.openxmlformats.org/drawingml/2006/main">
               <a:ext uri="{FF2B5EF4-FFF2-40B4-BE49-F238E27FC236}">
-                <a16:creationId xmlns:a16="http://schemas.microsoft.com/office/drawing/2014/main" id="{B4C67152-334D-4D34-A790-D82DF3CF35A1}"/>
+                <a16:creationId xmlns:a16="http://schemas.microsoft.com/office/drawing/2014/main" id="{9D06E15B-52C1-48F8-BD4A-7202D28B55BF}"/>
               </a:ext>
             </a:extLst>
           </p:cNvPr>
@@ -5965,7 +5965,7 @@
           <p:cNvPr id="9" name="">
             <a:extLst xmlns:a="http://schemas.openxmlformats.org/drawingml/2006/main">
               <a:ext uri="{FF2B5EF4-FFF2-40B4-BE49-F238E27FC236}">
-                <a16:creationId xmlns:a16="http://schemas.microsoft.com/office/drawing/2014/main" id="{147C07B9-1DB3-4012-AFE7-20A9C372F15D}"/>
+                <a16:creationId xmlns:a16="http://schemas.microsoft.com/office/drawing/2014/main" id="{4DA1E473-8C9B-45FB-8919-A0CE6F9F3EC1}"/>
               </a:ext>
             </a:extLst>
           </p:cNvPr>
@@ -6022,7 +6022,7 @@
           <p:cNvPr id="10" name="">
             <a:extLst xmlns:a="http://schemas.openxmlformats.org/drawingml/2006/main">
               <a:ext uri="{FF2B5EF4-FFF2-40B4-BE49-F238E27FC236}">
-                <a16:creationId xmlns:a16="http://schemas.microsoft.com/office/drawing/2014/main" id="{9C957CF2-3BDB-48B8-A856-0E2040F8F8A3}"/>
+                <a16:creationId xmlns:a16="http://schemas.microsoft.com/office/drawing/2014/main" id="{9B27D97C-2500-490D-840F-0FBB98FFFF6F}"/>
               </a:ext>
             </a:extLst>
           </p:cNvPr>
@@ -6056,7 +6056,7 @@
           <p:cNvPr id="11" name="">
             <a:extLst xmlns:a="http://schemas.openxmlformats.org/drawingml/2006/main">
               <a:ext uri="{FF2B5EF4-FFF2-40B4-BE49-F238E27FC236}">
-                <a16:creationId xmlns:a16="http://schemas.microsoft.com/office/drawing/2014/main" id="{7F8A1BB5-97CD-4E3E-9B15-F906F946A6EA}"/>
+                <a16:creationId xmlns:a16="http://schemas.microsoft.com/office/drawing/2014/main" id="{7BB3EC46-87DF-46AA-8BAA-05B5AB17173D}"/>
               </a:ext>
             </a:extLst>
           </p:cNvPr>
@@ -6088,7 +6088,7 @@
           <p:cNvPr id="12" name="">
             <a:extLst xmlns:a="http://schemas.openxmlformats.org/drawingml/2006/main">
               <a:ext uri="{FF2B5EF4-FFF2-40B4-BE49-F238E27FC236}">
-                <a16:creationId xmlns:a16="http://schemas.microsoft.com/office/drawing/2014/main" id="{6B27254A-19DB-4D64-8E3A-87A3203AB14E}"/>
+                <a16:creationId xmlns:a16="http://schemas.microsoft.com/office/drawing/2014/main" id="{7F47020B-9766-4A30-AF07-01AAE9A7487C}"/>
               </a:ext>
             </a:extLst>
           </p:cNvPr>
@@ -6145,7 +6145,7 @@
           <p:cNvPr id="13" name="">
             <a:extLst xmlns:a="http://schemas.openxmlformats.org/drawingml/2006/main">
               <a:ext uri="{FF2B5EF4-FFF2-40B4-BE49-F238E27FC236}">
-                <a16:creationId xmlns:a16="http://schemas.microsoft.com/office/drawing/2014/main" id="{850A3F51-17DA-4CB8-9AEB-806052935930}"/>
+                <a16:creationId xmlns:a16="http://schemas.microsoft.com/office/drawing/2014/main" id="{3F305A9E-538E-45BC-9FC6-DEC06C5DCD39}"/>
               </a:ext>
             </a:extLst>
           </p:cNvPr>
@@ -6202,7 +6202,7 @@
           <p:cNvPr id="14" name="">
             <a:extLst xmlns:a="http://schemas.openxmlformats.org/drawingml/2006/main">
               <a:ext uri="{FF2B5EF4-FFF2-40B4-BE49-F238E27FC236}">
-                <a16:creationId xmlns:a16="http://schemas.microsoft.com/office/drawing/2014/main" id="{9339FEBE-C232-4CAC-899B-D17FFCB8E506}"/>
+                <a16:creationId xmlns:a16="http://schemas.microsoft.com/office/drawing/2014/main" id="{7CA87CCB-026D-4FFD-ADC7-8DA2E7AFF7D9}"/>
               </a:ext>
             </a:extLst>
           </p:cNvPr>
@@ -6236,7 +6236,7 @@
           <p:cNvPr id="15" name="">
             <a:extLst xmlns:a="http://schemas.openxmlformats.org/drawingml/2006/main">
               <a:ext uri="{FF2B5EF4-FFF2-40B4-BE49-F238E27FC236}">
-                <a16:creationId xmlns:a16="http://schemas.microsoft.com/office/drawing/2014/main" id="{F3F8213B-3A5F-484B-9FAA-2C7CDB8AF6A9}"/>
+                <a16:creationId xmlns:a16="http://schemas.microsoft.com/office/drawing/2014/main" id="{AF3ED788-A80C-4D1C-AC4D-2E47CCE439F0}"/>
               </a:ext>
             </a:extLst>
           </p:cNvPr>
@@ -6268,7 +6268,7 @@
           <p:cNvPr id="16" name="">
             <a:extLst xmlns:a="http://schemas.openxmlformats.org/drawingml/2006/main">
               <a:ext uri="{FF2B5EF4-FFF2-40B4-BE49-F238E27FC236}">
-                <a16:creationId xmlns:a16="http://schemas.microsoft.com/office/drawing/2014/main" id="{3A5CC420-F4BF-439D-9D5B-EF4AE85780C9}"/>
+                <a16:creationId xmlns:a16="http://schemas.microsoft.com/office/drawing/2014/main" id="{6EA10DFA-F903-4DEA-BB9A-C7FBD43138ED}"/>
               </a:ext>
             </a:extLst>
           </p:cNvPr>
@@ -6325,7 +6325,7 @@
           <p:cNvPr id="17" name="">
             <a:extLst xmlns:a="http://schemas.openxmlformats.org/drawingml/2006/main">
               <a:ext uri="{FF2B5EF4-FFF2-40B4-BE49-F238E27FC236}">
-                <a16:creationId xmlns:a16="http://schemas.microsoft.com/office/drawing/2014/main" id="{409DD876-6D8E-45DF-82AF-5D4B324F4776}"/>
+                <a16:creationId xmlns:a16="http://schemas.microsoft.com/office/drawing/2014/main" id="{C86A9376-8DAC-4C48-8CAC-84CE655BAFE8}"/>
               </a:ext>
             </a:extLst>
           </p:cNvPr>
@@ -6382,7 +6382,7 @@
           <p:cNvPr id="18" name="">
             <a:extLst xmlns:a="http://schemas.openxmlformats.org/drawingml/2006/main">
               <a:ext uri="{FF2B5EF4-FFF2-40B4-BE49-F238E27FC236}">
-                <a16:creationId xmlns:a16="http://schemas.microsoft.com/office/drawing/2014/main" id="{B4927875-0DEA-444D-8646-C66525BF6DD7}"/>
+                <a16:creationId xmlns:a16="http://schemas.microsoft.com/office/drawing/2014/main" id="{9EFCC867-2202-4090-9FFE-56BA6E66191A}"/>
               </a:ext>
             </a:extLst>
           </p:cNvPr>
@@ -6416,7 +6416,7 @@
           <p:cNvPr id="19" name="">
             <a:extLst xmlns:a="http://schemas.openxmlformats.org/drawingml/2006/main">
               <a:ext uri="{FF2B5EF4-FFF2-40B4-BE49-F238E27FC236}">
-                <a16:creationId xmlns:a16="http://schemas.microsoft.com/office/drawing/2014/main" id="{B955DF0C-EE42-4F13-B866-6D292FFE50C0}"/>
+                <a16:creationId xmlns:a16="http://schemas.microsoft.com/office/drawing/2014/main" id="{4F3454E8-1095-4ED6-ABDF-4320D18C4412}"/>
               </a:ext>
             </a:extLst>
           </p:cNvPr>
@@ -6448,7 +6448,7 @@
           <p:cNvPr id="20" name="">
             <a:extLst xmlns:a="http://schemas.openxmlformats.org/drawingml/2006/main">
               <a:ext uri="{FF2B5EF4-FFF2-40B4-BE49-F238E27FC236}">
-                <a16:creationId xmlns:a16="http://schemas.microsoft.com/office/drawing/2014/main" id="{7D01286E-CBD0-4EBD-A9FA-F8D8BF295829}"/>
+                <a16:creationId xmlns:a16="http://schemas.microsoft.com/office/drawing/2014/main" id="{452994FE-7EEF-4F9A-A35F-D353C7FCB1E3}"/>
               </a:ext>
             </a:extLst>
           </p:cNvPr>
@@ -6505,7 +6505,7 @@
           <p:cNvPr id="21" name="">
             <a:extLst xmlns:a="http://schemas.openxmlformats.org/drawingml/2006/main">
               <a:ext uri="{FF2B5EF4-FFF2-40B4-BE49-F238E27FC236}">
-                <a16:creationId xmlns:a16="http://schemas.microsoft.com/office/drawing/2014/main" id="{A645A934-2959-4298-96AE-52D9761BA4F3}"/>
+                <a16:creationId xmlns:a16="http://schemas.microsoft.com/office/drawing/2014/main" id="{A315F3E0-E267-44EE-8BED-F6AFE5DEFD7E}"/>
               </a:ext>
             </a:extLst>
           </p:cNvPr>
@@ -6562,7 +6562,7 @@
           <p:cNvPr id="22" name="">
             <a:extLst xmlns:a="http://schemas.openxmlformats.org/drawingml/2006/main">
               <a:ext uri="{FF2B5EF4-FFF2-40B4-BE49-F238E27FC236}">
-                <a16:creationId xmlns:a16="http://schemas.microsoft.com/office/drawing/2014/main" id="{CE82E1F3-2872-41B0-8A6D-BCF11EC495DA}"/>
+                <a16:creationId xmlns:a16="http://schemas.microsoft.com/office/drawing/2014/main" id="{2EA6498F-179E-46E8-BF58-1B03C1D2A243}"/>
               </a:ext>
             </a:extLst>
           </p:cNvPr>
@@ -6617,7 +6617,7 @@
     </p:spTree>
     <p:extLst>
       <p:ext uri="{BB962C8B-B14F-4D97-AF65-F5344CB8AC3E}">
-        <p14:creationId xmlns:p14="http://schemas.microsoft.com/office/powerpoint/2010/main" val="1722068113"/>
+        <p14:creationId xmlns:p14="http://schemas.microsoft.com/office/powerpoint/2010/main" val="734484423"/>
       </p:ext>
     </p:extLst>
   </p:cSld>
@@ -6818,7 +6818,7 @@
           <p:cNvPr id="16" name="">
             <a:extLst xmlns:a="http://schemas.openxmlformats.org/drawingml/2006/main">
               <a:ext uri="{FF2B5EF4-FFF2-40B4-BE49-F238E27FC236}">
-                <a16:creationId xmlns:a16="http://schemas.microsoft.com/office/drawing/2014/main" id="{31B36BAD-03E6-4E14-8777-A399E0D5BCF0}"/>
+                <a16:creationId xmlns:a16="http://schemas.microsoft.com/office/drawing/2014/main" id="{4611CC46-E17C-4432-BDBB-4D0198AE8094}"/>
               </a:ext>
             </a:extLst>
           </p:cNvPr>
@@ -6850,7 +6850,7 @@
           <p:cNvPr id="2" name="">
             <a:extLst xmlns:a="http://schemas.openxmlformats.org/drawingml/2006/main">
               <a:ext uri="{FF2B5EF4-FFF2-40B4-BE49-F238E27FC236}">
-                <a16:creationId xmlns:a16="http://schemas.microsoft.com/office/drawing/2014/main" id="{F2DA74A1-A116-4E5F-B060-EC2ACC2CEAC4}"/>
+                <a16:creationId xmlns:a16="http://schemas.microsoft.com/office/drawing/2014/main" id="{581D37F8-2B69-4CFA-A76F-94518A59135B}"/>
               </a:ext>
             </a:extLst>
           </p:cNvPr>
@@ -6907,7 +6907,7 @@
           <p:cNvPr id="3" name="">
             <a:extLst xmlns:a="http://schemas.openxmlformats.org/drawingml/2006/main">
               <a:ext uri="{FF2B5EF4-FFF2-40B4-BE49-F238E27FC236}">
-                <a16:creationId xmlns:a16="http://schemas.microsoft.com/office/drawing/2014/main" id="{233283AB-1509-4152-9E97-5B21F8B7C23C}"/>
+                <a16:creationId xmlns:a16="http://schemas.microsoft.com/office/drawing/2014/main" id="{03D8D245-F3B0-4594-8136-B077A605980C}"/>
               </a:ext>
             </a:extLst>
           </p:cNvPr>
@@ -6939,7 +6939,7 @@
           <p:cNvPr id="4" name="">
             <a:extLst xmlns:a="http://schemas.openxmlformats.org/drawingml/2006/main">
               <a:ext uri="{FF2B5EF4-FFF2-40B4-BE49-F238E27FC236}">
-                <a16:creationId xmlns:a16="http://schemas.microsoft.com/office/drawing/2014/main" id="{8DDE1AE1-3558-4597-AF0B-960806009813}"/>
+                <a16:creationId xmlns:a16="http://schemas.microsoft.com/office/drawing/2014/main" id="{E4F96BF1-F363-48EE-ACE8-3239263FCC25}"/>
               </a:ext>
             </a:extLst>
           </p:cNvPr>
@@ -6996,7 +6996,7 @@
           <p:cNvPr id="5" name="">
             <a:extLst xmlns:a="http://schemas.openxmlformats.org/drawingml/2006/main">
               <a:ext uri="{FF2B5EF4-FFF2-40B4-BE49-F238E27FC236}">
-                <a16:creationId xmlns:a16="http://schemas.microsoft.com/office/drawing/2014/main" id="{B1F535C9-D311-4DFE-B1E1-D71FFE1A026C}"/>
+                <a16:creationId xmlns:a16="http://schemas.microsoft.com/office/drawing/2014/main" id="{83C4BD15-F5A9-49D4-9E0F-EF938BA88250}"/>
               </a:ext>
             </a:extLst>
           </p:cNvPr>
@@ -7053,7 +7053,7 @@
           <p:cNvPr id="6" name="">
             <a:extLst xmlns:a="http://schemas.openxmlformats.org/drawingml/2006/main">
               <a:ext uri="{FF2B5EF4-FFF2-40B4-BE49-F238E27FC236}">
-                <a16:creationId xmlns:a16="http://schemas.microsoft.com/office/drawing/2014/main" id="{E1055E54-2133-4D38-9552-F62B706897C2}"/>
+                <a16:creationId xmlns:a16="http://schemas.microsoft.com/office/drawing/2014/main" id="{3CDC4568-5DBF-4A42-9AB9-29BEDBCC5479}"/>
               </a:ext>
             </a:extLst>
           </p:cNvPr>
@@ -7110,7 +7110,7 @@
           <p:cNvPr id="7" name="">
             <a:extLst xmlns:a="http://schemas.openxmlformats.org/drawingml/2006/main">
               <a:ext uri="{FF2B5EF4-FFF2-40B4-BE49-F238E27FC236}">
-                <a16:creationId xmlns:a16="http://schemas.microsoft.com/office/drawing/2014/main" id="{CD24D5A0-6EA9-472C-A9E3-862EDF9A4E22}"/>
+                <a16:creationId xmlns:a16="http://schemas.microsoft.com/office/drawing/2014/main" id="{053E3F9C-9DA1-4A48-99B4-C658B1074F56}"/>
               </a:ext>
             </a:extLst>
           </p:cNvPr>
@@ -7142,7 +7142,7 @@
           <p:cNvPr id="8" name="">
             <a:extLst xmlns:a="http://schemas.openxmlformats.org/drawingml/2006/main">
               <a:ext uri="{FF2B5EF4-FFF2-40B4-BE49-F238E27FC236}">
-                <a16:creationId xmlns:a16="http://schemas.microsoft.com/office/drawing/2014/main" id="{B98712F3-C1C0-41A3-8EE0-43E2A7E78E5F}"/>
+                <a16:creationId xmlns:a16="http://schemas.microsoft.com/office/drawing/2014/main" id="{C4137D66-36F8-4B51-8238-C4AFBD1ABACE}"/>
               </a:ext>
             </a:extLst>
           </p:cNvPr>
@@ -7199,7 +7199,7 @@
           <p:cNvPr id="9" name="">
             <a:extLst xmlns:a="http://schemas.openxmlformats.org/drawingml/2006/main">
               <a:ext uri="{FF2B5EF4-FFF2-40B4-BE49-F238E27FC236}">
-                <a16:creationId xmlns:a16="http://schemas.microsoft.com/office/drawing/2014/main" id="{63401ABE-3A2C-48AB-AE15-B807C90D1D61}"/>
+                <a16:creationId xmlns:a16="http://schemas.microsoft.com/office/drawing/2014/main" id="{4221F0D4-84A3-49DA-9727-7D6C861DEA17}"/>
               </a:ext>
             </a:extLst>
           </p:cNvPr>
@@ -7256,7 +7256,7 @@
           <p:cNvPr id="10" name="">
             <a:extLst xmlns:a="http://schemas.openxmlformats.org/drawingml/2006/main">
               <a:ext uri="{FF2B5EF4-FFF2-40B4-BE49-F238E27FC236}">
-                <a16:creationId xmlns:a16="http://schemas.microsoft.com/office/drawing/2014/main" id="{B3BD68D4-A8BC-491E-A5F5-929DCD42A187}"/>
+                <a16:creationId xmlns:a16="http://schemas.microsoft.com/office/drawing/2014/main" id="{14DE7DD9-03B8-44A2-B001-D1EC8D1F9B10}"/>
               </a:ext>
             </a:extLst>
           </p:cNvPr>
@@ -7313,7 +7313,7 @@
           <p:cNvPr id="11" name="">
             <a:extLst xmlns:a="http://schemas.openxmlformats.org/drawingml/2006/main">
               <a:ext uri="{FF2B5EF4-FFF2-40B4-BE49-F238E27FC236}">
-                <a16:creationId xmlns:a16="http://schemas.microsoft.com/office/drawing/2014/main" id="{C9027C0A-E9E8-4151-9BB1-FC73E10A2996}"/>
+                <a16:creationId xmlns:a16="http://schemas.microsoft.com/office/drawing/2014/main" id="{C1EEAF01-E77C-4AC9-A11E-EC451FF85339}"/>
               </a:ext>
             </a:extLst>
           </p:cNvPr>
@@ -7345,7 +7345,7 @@
           <p:cNvPr id="12" name="">
             <a:extLst xmlns:a="http://schemas.openxmlformats.org/drawingml/2006/main">
               <a:ext uri="{FF2B5EF4-FFF2-40B4-BE49-F238E27FC236}">
-                <a16:creationId xmlns:a16="http://schemas.microsoft.com/office/drawing/2014/main" id="{AFA985DE-F3DD-42E6-ADA0-272AF8112767}"/>
+                <a16:creationId xmlns:a16="http://schemas.microsoft.com/office/drawing/2014/main" id="{9A5FBBDB-6C25-4530-ACA3-3B9B0656CDE4}"/>
               </a:ext>
             </a:extLst>
           </p:cNvPr>
@@ -7402,7 +7402,7 @@
           <p:cNvPr id="13" name="">
             <a:extLst xmlns:a="http://schemas.openxmlformats.org/drawingml/2006/main">
               <a:ext uri="{FF2B5EF4-FFF2-40B4-BE49-F238E27FC236}">
-                <a16:creationId xmlns:a16="http://schemas.microsoft.com/office/drawing/2014/main" id="{2D4FBDE3-BA5A-49F9-8D37-52493CB9B58B}"/>
+                <a16:creationId xmlns:a16="http://schemas.microsoft.com/office/drawing/2014/main" id="{0D070A33-7802-42C3-8248-86D98A54FCBB}"/>
               </a:ext>
             </a:extLst>
           </p:cNvPr>
@@ -7459,7 +7459,7 @@
           <p:cNvPr id="14" name="">
             <a:extLst xmlns:a="http://schemas.openxmlformats.org/drawingml/2006/main">
               <a:ext uri="{FF2B5EF4-FFF2-40B4-BE49-F238E27FC236}">
-                <a16:creationId xmlns:a16="http://schemas.microsoft.com/office/drawing/2014/main" id="{62DBC1B6-10F3-4CE2-B8AA-0B1B9B6C91B6}"/>
+                <a16:creationId xmlns:a16="http://schemas.microsoft.com/office/drawing/2014/main" id="{628592A5-B3D1-48D8-9201-BD0050317BDF}"/>
               </a:ext>
             </a:extLst>
           </p:cNvPr>
@@ -7516,7 +7516,7 @@
           <p:cNvPr id="15" name="">
             <a:extLst xmlns:a="http://schemas.openxmlformats.org/drawingml/2006/main">
               <a:ext uri="{FF2B5EF4-FFF2-40B4-BE49-F238E27FC236}">
-                <a16:creationId xmlns:a16="http://schemas.microsoft.com/office/drawing/2014/main" id="{B1EA7252-6D3A-4380-91FF-2C2199674536}"/>
+                <a16:creationId xmlns:a16="http://schemas.microsoft.com/office/drawing/2014/main" id="{22ACA73C-FE49-427E-9610-8FDC6908F6EC}"/>
               </a:ext>
             </a:extLst>
           </p:cNvPr>
@@ -7571,7 +7571,7 @@
     </p:spTree>
     <p:extLst>
       <p:ext uri="{BB962C8B-B14F-4D97-AF65-F5344CB8AC3E}">
-        <p14:creationId xmlns:p14="http://schemas.microsoft.com/office/powerpoint/2010/main" val="280310886"/>
+        <p14:creationId xmlns:p14="http://schemas.microsoft.com/office/powerpoint/2010/main" val="1442639454"/>
       </p:ext>
     </p:extLst>
   </p:cSld>
@@ -7772,7 +7772,7 @@
           <p:cNvPr id="23" name="">
             <a:extLst xmlns:a="http://schemas.openxmlformats.org/drawingml/2006/main">
               <a:ext uri="{FF2B5EF4-FFF2-40B4-BE49-F238E27FC236}">
-                <a16:creationId xmlns:a16="http://schemas.microsoft.com/office/drawing/2014/main" id="{3D27881E-1C77-4129-A0FD-DFBC81A89709}"/>
+                <a16:creationId xmlns:a16="http://schemas.microsoft.com/office/drawing/2014/main" id="{30C69686-8C76-4950-A927-4B71A1E6C3D6}"/>
               </a:ext>
             </a:extLst>
           </p:cNvPr>
@@ -7804,7 +7804,7 @@
           <p:cNvPr id="2" name="">
             <a:extLst xmlns:a="http://schemas.openxmlformats.org/drawingml/2006/main">
               <a:ext uri="{FF2B5EF4-FFF2-40B4-BE49-F238E27FC236}">
-                <a16:creationId xmlns:a16="http://schemas.microsoft.com/office/drawing/2014/main" id="{CD15981A-A7A8-41F9-AA9D-B49FD49892C0}"/>
+                <a16:creationId xmlns:a16="http://schemas.microsoft.com/office/drawing/2014/main" id="{868E8F14-EFBC-4932-94CA-07C513D64EE7}"/>
               </a:ext>
             </a:extLst>
           </p:cNvPr>
@@ -7861,7 +7861,7 @@
           <p:cNvPr id="3" name="">
             <a:extLst xmlns:a="http://schemas.openxmlformats.org/drawingml/2006/main">
               <a:ext uri="{FF2B5EF4-FFF2-40B4-BE49-F238E27FC236}">
-                <a16:creationId xmlns:a16="http://schemas.microsoft.com/office/drawing/2014/main" id="{83758E76-71EA-4ED4-AE54-89E7836DFB45}"/>
+                <a16:creationId xmlns:a16="http://schemas.microsoft.com/office/drawing/2014/main" id="{D1AF6D9C-7A53-4A5D-84C8-CD11710D2BB4}"/>
               </a:ext>
             </a:extLst>
           </p:cNvPr>
@@ -7893,7 +7893,7 @@
           <p:cNvPr id="4" name="">
             <a:extLst xmlns:a="http://schemas.openxmlformats.org/drawingml/2006/main">
               <a:ext uri="{FF2B5EF4-FFF2-40B4-BE49-F238E27FC236}">
-                <a16:creationId xmlns:a16="http://schemas.microsoft.com/office/drawing/2014/main" id="{9C020134-CC70-44B8-9DC1-35C7B6CDAD30}"/>
+                <a16:creationId xmlns:a16="http://schemas.microsoft.com/office/drawing/2014/main" id="{B8435771-BB0D-476F-818D-5C0E127D048E}"/>
               </a:ext>
             </a:extLst>
           </p:cNvPr>
@@ -7950,7 +7950,7 @@
           <p:cNvPr id="5" name="">
             <a:extLst xmlns:a="http://schemas.openxmlformats.org/drawingml/2006/main">
               <a:ext uri="{FF2B5EF4-FFF2-40B4-BE49-F238E27FC236}">
-                <a16:creationId xmlns:a16="http://schemas.microsoft.com/office/drawing/2014/main" id="{5A288009-4303-4CA2-8883-F5DEB5238256}"/>
+                <a16:creationId xmlns:a16="http://schemas.microsoft.com/office/drawing/2014/main" id="{94CEA155-60B1-483B-B5BE-8CF38577E7BC}"/>
               </a:ext>
             </a:extLst>
           </p:cNvPr>
@@ -8007,7 +8007,7 @@
           <p:cNvPr id="6" name="">
             <a:extLst xmlns:a="http://schemas.openxmlformats.org/drawingml/2006/main">
               <a:ext uri="{FF2B5EF4-FFF2-40B4-BE49-F238E27FC236}">
-                <a16:creationId xmlns:a16="http://schemas.microsoft.com/office/drawing/2014/main" id="{5AE685E2-52F6-4336-AAE3-E33A74B159D1}"/>
+                <a16:creationId xmlns:a16="http://schemas.microsoft.com/office/drawing/2014/main" id="{F034A19E-5B86-4997-BED3-4E20F8D25B0E}"/>
               </a:ext>
             </a:extLst>
           </p:cNvPr>
@@ -8064,7 +8064,7 @@
           <p:cNvPr id="7" name="">
             <a:extLst xmlns:a="http://schemas.openxmlformats.org/drawingml/2006/main">
               <a:ext uri="{FF2B5EF4-FFF2-40B4-BE49-F238E27FC236}">
-                <a16:creationId xmlns:a16="http://schemas.microsoft.com/office/drawing/2014/main" id="{8237C28C-5D20-48FE-8EAB-893B5B6AA5EA}"/>
+                <a16:creationId xmlns:a16="http://schemas.microsoft.com/office/drawing/2014/main" id="{99934EFF-A77B-4FF2-9674-1210844B7778}"/>
               </a:ext>
             </a:extLst>
           </p:cNvPr>
@@ -8096,7 +8096,7 @@
           <p:cNvPr id="8" name="">
             <a:extLst xmlns:a="http://schemas.openxmlformats.org/drawingml/2006/main">
               <a:ext uri="{FF2B5EF4-FFF2-40B4-BE49-F238E27FC236}">
-                <a16:creationId xmlns:a16="http://schemas.microsoft.com/office/drawing/2014/main" id="{D49C6ECF-2865-4254-AA54-1C911C7BFC7A}"/>
+                <a16:creationId xmlns:a16="http://schemas.microsoft.com/office/drawing/2014/main" id="{EB56AED0-54EC-4C8D-898F-5E19613A4E72}"/>
               </a:ext>
             </a:extLst>
           </p:cNvPr>
@@ -8153,7 +8153,7 @@
           <p:cNvPr id="9" name="">
             <a:extLst xmlns:a="http://schemas.openxmlformats.org/drawingml/2006/main">
               <a:ext uri="{FF2B5EF4-FFF2-40B4-BE49-F238E27FC236}">
-                <a16:creationId xmlns:a16="http://schemas.microsoft.com/office/drawing/2014/main" id="{025501F6-04DB-457A-8FCE-B7BC7E6FB50A}"/>
+                <a16:creationId xmlns:a16="http://schemas.microsoft.com/office/drawing/2014/main" id="{0D30DEA9-E7EF-47D1-9984-19E971993CFD}"/>
               </a:ext>
             </a:extLst>
           </p:cNvPr>
@@ -8210,19 +8210,19 @@
           <p:cNvPr id="10" name="">
             <a:extLst xmlns:a="http://schemas.openxmlformats.org/drawingml/2006/main">
               <a:ext uri="{FF2B5EF4-FFF2-40B4-BE49-F238E27FC236}">
-                <a16:creationId xmlns:a16="http://schemas.microsoft.com/office/drawing/2014/main" id="{51F802E0-7E0A-4DA6-AC19-56ACF0C9F3B7}"/>
-              </a:ext>
-            </a:extLst>
-          </p:cNvPr>
-          <p:cNvSpPr>
-            <a:spLocks xmlns:a="http://schemas.openxmlformats.org/drawingml/2006/main" noGrp="1"/>
-          </p:cNvSpPr>
-          <p:nvPr/>
-        </p:nvSpPr>
-        <p:spPr>
-          <a:xfrm xmlns:a="http://schemas.openxmlformats.org/drawingml/2006/main">
-            <a:off x="914400" y="1257300"/>
-            <a:ext cx="10363200" cy="781050"/>
+                <a16:creationId xmlns:a16="http://schemas.microsoft.com/office/drawing/2014/main" id="{6F05DB92-93E6-4C17-80D9-DC21E4DCAE44}"/>
+              </a:ext>
+            </a:extLst>
+          </p:cNvPr>
+          <p:cNvSpPr>
+            <a:spLocks xmlns:a="http://schemas.openxmlformats.org/drawingml/2006/main" noGrp="1"/>
+          </p:cNvSpPr>
+          <p:nvPr/>
+        </p:nvSpPr>
+        <p:spPr>
+          <a:xfrm xmlns:a="http://schemas.openxmlformats.org/drawingml/2006/main">
+            <a:off x="857250" y="1219200"/>
+            <a:ext cx="10477500" cy="742950"/>
           </a:xfrm>
           <a:prstGeom xmlns:a="http://schemas.openxmlformats.org/drawingml/2006/main" prst="rect">
             <a:avLst/>
@@ -8239,7 +8239,7 @@
           <a:lstStyle xmlns:a="http://schemas.openxmlformats.org/drawingml/2006/main"/>
           <a:p xmlns:a="http://schemas.openxmlformats.org/drawingml/2006/main">
             <a:pPr algn="ctr">
-              <a:defRPr sz="2175" b="1">
+              <a:defRPr sz="2100" b="1">
                 <a:solidFill>
                   <a:srgbClr val="17253A"/>
                 </a:solidFill>
@@ -8249,7 +8249,7 @@
               </a:defRPr>
             </a:pPr>
             <a:r>
-              <a:rPr sz="2175" b="1">
+              <a:rPr sz="2100" b="1">
                 <a:solidFill>
                   <a:srgbClr val="17253A"/>
                 </a:solidFill>
@@ -8267,28 +8267,30 @@
           <p:cNvPr id="11" name="">
             <a:extLst xmlns:a="http://schemas.openxmlformats.org/drawingml/2006/main">
               <a:ext uri="{FF2B5EF4-FFF2-40B4-BE49-F238E27FC236}">
-                <a16:creationId xmlns:a16="http://schemas.microsoft.com/office/drawing/2014/main" id="{32AC1FC2-A185-40D6-ABEB-7E2D85E5768F}"/>
-              </a:ext>
-            </a:extLst>
-          </p:cNvPr>
-          <p:cNvSpPr>
-            <a:spLocks xmlns:a="http://schemas.openxmlformats.org/drawingml/2006/main" noGrp="1"/>
-          </p:cNvSpPr>
-          <p:nvPr/>
-        </p:nvSpPr>
-        <p:spPr>
-          <a:xfrm xmlns:a="http://schemas.openxmlformats.org/drawingml/2006/main">
-            <a:off x="1000125" y="2247900"/>
-            <a:ext cx="476250" cy="476250"/>
-          </a:xfrm>
-          <a:prstGeom xmlns:a="http://schemas.openxmlformats.org/drawingml/2006/main" prst="ellipse">
+                <a16:creationId xmlns:a16="http://schemas.microsoft.com/office/drawing/2014/main" id="{2F29C735-8CB0-4424-B052-BB6C52DFA5B9}"/>
+              </a:ext>
+            </a:extLst>
+          </p:cNvPr>
+          <p:cNvSpPr>
+            <a:spLocks xmlns:a="http://schemas.openxmlformats.org/drawingml/2006/main" noGrp="1"/>
+          </p:cNvSpPr>
+          <p:nvPr/>
+        </p:nvSpPr>
+        <p:spPr>
+          <a:xfrm xmlns:a="http://schemas.openxmlformats.org/drawingml/2006/main">
+            <a:off x="971550" y="2124075"/>
+            <a:ext cx="38100" cy="3524250"/>
+          </a:xfrm>
+          <a:prstGeom xmlns:a="http://schemas.openxmlformats.org/drawingml/2006/main" prst="rect">
             <a:avLst/>
           </a:prstGeom>
           <a:solidFill xmlns:a="http://schemas.openxmlformats.org/drawingml/2006/main">
-            <a:srgbClr val="18324A"/>
+            <a:srgbClr val="2C6E73"/>
           </a:solidFill>
           <a:ln xmlns:a="http://schemas.openxmlformats.org/drawingml/2006/main" w="0">
-            <a:noFill/>
+            <a:solidFill>
+              <a:srgbClr val="2C6E73"/>
+            </a:solidFill>
           </a:ln>
         </p:spPr>
       </p:sp>
@@ -8297,19 +8299,19 @@
           <p:cNvPr id="12" name="">
             <a:extLst xmlns:a="http://schemas.openxmlformats.org/drawingml/2006/main">
               <a:ext uri="{FF2B5EF4-FFF2-40B4-BE49-F238E27FC236}">
-                <a16:creationId xmlns:a16="http://schemas.microsoft.com/office/drawing/2014/main" id="{5FB29FD9-C36F-4A4D-A558-88DB4277D238}"/>
-              </a:ext>
-            </a:extLst>
-          </p:cNvPr>
-          <p:cNvSpPr>
-            <a:spLocks xmlns:a="http://schemas.openxmlformats.org/drawingml/2006/main" noGrp="1"/>
-          </p:cNvSpPr>
-          <p:nvPr/>
-        </p:nvSpPr>
-        <p:spPr>
-          <a:xfrm xmlns:a="http://schemas.openxmlformats.org/drawingml/2006/main">
-            <a:off x="1000125" y="2276475"/>
-            <a:ext cx="476250" cy="419100"/>
+                <a16:creationId xmlns:a16="http://schemas.microsoft.com/office/drawing/2014/main" id="{CE32462A-A5EC-428F-9579-97F5BFD224C4}"/>
+              </a:ext>
+            </a:extLst>
+          </p:cNvPr>
+          <p:cNvSpPr>
+            <a:spLocks xmlns:a="http://schemas.openxmlformats.org/drawingml/2006/main" noGrp="1"/>
+          </p:cNvSpPr>
+          <p:nvPr/>
+        </p:nvSpPr>
+        <p:spPr>
+          <a:xfrm xmlns:a="http://schemas.openxmlformats.org/drawingml/2006/main">
+            <a:off x="1162050" y="2200275"/>
+            <a:ext cx="400050" cy="400050"/>
           </a:xfrm>
           <a:prstGeom xmlns:a="http://schemas.openxmlformats.org/drawingml/2006/main" prst="rect">
             <a:avLst/>
@@ -8326,9 +8328,9 @@
           <a:lstStyle xmlns:a="http://schemas.openxmlformats.org/drawingml/2006/main"/>
           <a:p xmlns:a="http://schemas.openxmlformats.org/drawingml/2006/main">
             <a:pPr algn="ctr">
-              <a:defRPr sz="1350" b="1">
-                <a:solidFill>
-                  <a:srgbClr val="FFFFFF"/>
+              <a:defRPr sz="1125" b="1">
+                <a:solidFill>
+                  <a:srgbClr val="2C6E73"/>
                 </a:solidFill>
                 <a:latin typeface="Arial"/>
                 <a:ea typeface="Arial"/>
@@ -8336,9 +8338,9 @@
               </a:defRPr>
             </a:pPr>
             <a:r>
-              <a:rPr sz="1350" b="1">
-                <a:solidFill>
-                  <a:srgbClr val="FFFFFF"/>
+              <a:rPr sz="1125" b="1">
+                <a:solidFill>
+                  <a:srgbClr val="2C6E73"/>
                 </a:solidFill>
                 <a:latin typeface="Arial"/>
                 <a:ea typeface="Arial"/>
@@ -8354,19 +8356,19 @@
           <p:cNvPr id="13" name="">
             <a:extLst xmlns:a="http://schemas.openxmlformats.org/drawingml/2006/main">
               <a:ext uri="{FF2B5EF4-FFF2-40B4-BE49-F238E27FC236}">
-                <a16:creationId xmlns:a16="http://schemas.microsoft.com/office/drawing/2014/main" id="{A05E135F-42FC-4545-9470-A640D3229F58}"/>
-              </a:ext>
-            </a:extLst>
-          </p:cNvPr>
-          <p:cNvSpPr>
-            <a:spLocks xmlns:a="http://schemas.openxmlformats.org/drawingml/2006/main" noGrp="1"/>
-          </p:cNvSpPr>
-          <p:nvPr/>
-        </p:nvSpPr>
-        <p:spPr>
-          <a:xfrm xmlns:a="http://schemas.openxmlformats.org/drawingml/2006/main">
-            <a:off x="1714500" y="2181225"/>
-            <a:ext cx="9429750" cy="609600"/>
+                <a16:creationId xmlns:a16="http://schemas.microsoft.com/office/drawing/2014/main" id="{1E8E2E7D-2164-4D93-A559-7771479CB5B3}"/>
+              </a:ext>
+            </a:extLst>
+          </p:cNvPr>
+          <p:cNvSpPr>
+            <a:spLocks xmlns:a="http://schemas.openxmlformats.org/drawingml/2006/main" noGrp="1"/>
+          </p:cNvSpPr>
+          <p:nvPr/>
+        </p:nvSpPr>
+        <p:spPr>
+          <a:xfrm xmlns:a="http://schemas.openxmlformats.org/drawingml/2006/main">
+            <a:off x="1714500" y="2114550"/>
+            <a:ext cx="9525000" cy="809625"/>
           </a:xfrm>
           <a:prstGeom xmlns:a="http://schemas.openxmlformats.org/drawingml/2006/main" prst="rect">
             <a:avLst/>
@@ -8383,7 +8385,7 @@
           <a:lstStyle xmlns:a="http://schemas.openxmlformats.org/drawingml/2006/main"/>
           <a:p xmlns:a="http://schemas.openxmlformats.org/drawingml/2006/main">
             <a:pPr algn="l">
-              <a:defRPr sz="1500" b="0">
+              <a:defRPr sz="1725" b="0">
                 <a:solidFill>
                   <a:srgbClr val="17253A"/>
                 </a:solidFill>
@@ -8393,7 +8395,7 @@
               </a:defRPr>
             </a:pPr>
             <a:r>
-              <a:rPr sz="1500" b="0">
+              <a:rPr sz="1725" b="0">
                 <a:solidFill>
                   <a:srgbClr val="17253A"/>
                 </a:solidFill>
@@ -8401,7 +8403,7 @@
                 <a:ea typeface="Arial"/>
                 <a:cs typeface="Arial"/>
               </a:rPr>
-              <a:t>Identify the structure: Keep both sides balanced and identify the outer operation.</a:t>
+              <a:t>6(x + 4) = 72</a:t>
             </a:r>
           </a:p>
         </p:txBody>
@@ -8411,28 +8413,30 @@
           <p:cNvPr id="14" name="">
             <a:extLst xmlns:a="http://schemas.openxmlformats.org/drawingml/2006/main">
               <a:ext uri="{FF2B5EF4-FFF2-40B4-BE49-F238E27FC236}">
-                <a16:creationId xmlns:a16="http://schemas.microsoft.com/office/drawing/2014/main" id="{5C92DF57-9FB6-422E-83D2-CD998DA7553D}"/>
-              </a:ext>
-            </a:extLst>
-          </p:cNvPr>
-          <p:cNvSpPr>
-            <a:spLocks xmlns:a="http://schemas.openxmlformats.org/drawingml/2006/main" noGrp="1"/>
-          </p:cNvSpPr>
-          <p:nvPr/>
-        </p:nvSpPr>
-        <p:spPr>
-          <a:xfrm xmlns:a="http://schemas.openxmlformats.org/drawingml/2006/main">
-            <a:off x="1000125" y="2990850"/>
-            <a:ext cx="476250" cy="476250"/>
-          </a:xfrm>
-          <a:prstGeom xmlns:a="http://schemas.openxmlformats.org/drawingml/2006/main" prst="ellipse">
+                <a16:creationId xmlns:a16="http://schemas.microsoft.com/office/drawing/2014/main" id="{4D782CF4-6D3E-4098-A689-BB5972CF93D6}"/>
+              </a:ext>
+            </a:extLst>
+          </p:cNvPr>
+          <p:cNvSpPr>
+            <a:spLocks xmlns:a="http://schemas.openxmlformats.org/drawingml/2006/main" noGrp="1"/>
+          </p:cNvSpPr>
+          <p:nvPr/>
+        </p:nvSpPr>
+        <p:spPr>
+          <a:xfrm xmlns:a="http://schemas.openxmlformats.org/drawingml/2006/main">
+            <a:off x="1714500" y="2943225"/>
+            <a:ext cx="9334500" cy="9525"/>
+          </a:xfrm>
+          <a:prstGeom xmlns:a="http://schemas.openxmlformats.org/drawingml/2006/main" prst="rect">
             <a:avLst/>
           </a:prstGeom>
           <a:solidFill xmlns:a="http://schemas.openxmlformats.org/drawingml/2006/main">
-            <a:srgbClr val="2C6E73"/>
+            <a:srgbClr val="D9E0E6"/>
           </a:solidFill>
           <a:ln xmlns:a="http://schemas.openxmlformats.org/drawingml/2006/main" w="0">
-            <a:noFill/>
+            <a:solidFill>
+              <a:srgbClr val="D9E0E6"/>
+            </a:solidFill>
           </a:ln>
         </p:spPr>
       </p:sp>
@@ -8441,19 +8445,19 @@
           <p:cNvPr id="15" name="">
             <a:extLst xmlns:a="http://schemas.openxmlformats.org/drawingml/2006/main">
               <a:ext uri="{FF2B5EF4-FFF2-40B4-BE49-F238E27FC236}">
-                <a16:creationId xmlns:a16="http://schemas.microsoft.com/office/drawing/2014/main" id="{1D5C27F6-91B3-4105-BEF6-E7E788A80D8A}"/>
-              </a:ext>
-            </a:extLst>
-          </p:cNvPr>
-          <p:cNvSpPr>
-            <a:spLocks xmlns:a="http://schemas.openxmlformats.org/drawingml/2006/main" noGrp="1"/>
-          </p:cNvSpPr>
-          <p:nvPr/>
-        </p:nvSpPr>
-        <p:spPr>
-          <a:xfrm xmlns:a="http://schemas.openxmlformats.org/drawingml/2006/main">
-            <a:off x="1000125" y="3019425"/>
-            <a:ext cx="476250" cy="419100"/>
+                <a16:creationId xmlns:a16="http://schemas.microsoft.com/office/drawing/2014/main" id="{575F01A9-C99A-4E09-8FBB-C793D23ED9FD}"/>
+              </a:ext>
+            </a:extLst>
+          </p:cNvPr>
+          <p:cNvSpPr>
+            <a:spLocks xmlns:a="http://schemas.openxmlformats.org/drawingml/2006/main" noGrp="1"/>
+          </p:cNvSpPr>
+          <p:nvPr/>
+        </p:nvSpPr>
+        <p:spPr>
+          <a:xfrm xmlns:a="http://schemas.openxmlformats.org/drawingml/2006/main">
+            <a:off x="1162050" y="3076575"/>
+            <a:ext cx="400050" cy="400050"/>
           </a:xfrm>
           <a:prstGeom xmlns:a="http://schemas.openxmlformats.org/drawingml/2006/main" prst="rect">
             <a:avLst/>
@@ -8470,9 +8474,9 @@
           <a:lstStyle xmlns:a="http://schemas.openxmlformats.org/drawingml/2006/main"/>
           <a:p xmlns:a="http://schemas.openxmlformats.org/drawingml/2006/main">
             <a:pPr algn="ctr">
-              <a:defRPr sz="1350" b="1">
-                <a:solidFill>
-                  <a:srgbClr val="FFFFFF"/>
+              <a:defRPr sz="1125" b="1">
+                <a:solidFill>
+                  <a:srgbClr val="2C6E73"/>
                 </a:solidFill>
                 <a:latin typeface="Arial"/>
                 <a:ea typeface="Arial"/>
@@ -8480,9 +8484,9 @@
               </a:defRPr>
             </a:pPr>
             <a:r>
-              <a:rPr sz="1350" b="1">
-                <a:solidFill>
-                  <a:srgbClr val="FFFFFF"/>
+              <a:rPr sz="1125" b="1">
+                <a:solidFill>
+                  <a:srgbClr val="2C6E73"/>
                 </a:solidFill>
                 <a:latin typeface="Arial"/>
                 <a:ea typeface="Arial"/>
@@ -8498,19 +8502,19 @@
           <p:cNvPr id="16" name="">
             <a:extLst xmlns:a="http://schemas.openxmlformats.org/drawingml/2006/main">
               <a:ext uri="{FF2B5EF4-FFF2-40B4-BE49-F238E27FC236}">
-                <a16:creationId xmlns:a16="http://schemas.microsoft.com/office/drawing/2014/main" id="{0313330E-F1D3-43BB-961A-08BDEF03CA32}"/>
-              </a:ext>
-            </a:extLst>
-          </p:cNvPr>
-          <p:cNvSpPr>
-            <a:spLocks xmlns:a="http://schemas.openxmlformats.org/drawingml/2006/main" noGrp="1"/>
-          </p:cNvSpPr>
-          <p:nvPr/>
-        </p:nvSpPr>
-        <p:spPr>
-          <a:xfrm xmlns:a="http://schemas.openxmlformats.org/drawingml/2006/main">
-            <a:off x="1714500" y="2924175"/>
-            <a:ext cx="9429750" cy="609600"/>
+                <a16:creationId xmlns:a16="http://schemas.microsoft.com/office/drawing/2014/main" id="{6D50758E-DAE3-4531-84FD-E89DAA5345BF}"/>
+              </a:ext>
+            </a:extLst>
+          </p:cNvPr>
+          <p:cNvSpPr>
+            <a:spLocks xmlns:a="http://schemas.openxmlformats.org/drawingml/2006/main" noGrp="1"/>
+          </p:cNvSpPr>
+          <p:nvPr/>
+        </p:nvSpPr>
+        <p:spPr>
+          <a:xfrm xmlns:a="http://schemas.openxmlformats.org/drawingml/2006/main">
+            <a:off x="1714500" y="2990850"/>
+            <a:ext cx="9525000" cy="809625"/>
           </a:xfrm>
           <a:prstGeom xmlns:a="http://schemas.openxmlformats.org/drawingml/2006/main" prst="rect">
             <a:avLst/>
@@ -8527,7 +8531,7 @@
           <a:lstStyle xmlns:a="http://schemas.openxmlformats.org/drawingml/2006/main"/>
           <a:p xmlns:a="http://schemas.openxmlformats.org/drawingml/2006/main">
             <a:pPr algn="l">
-              <a:defRPr sz="1500" b="0">
+              <a:defRPr sz="1725" b="0">
                 <a:solidFill>
                   <a:srgbClr val="17253A"/>
                 </a:solidFill>
@@ -8537,7 +8541,7 @@
               </a:defRPr>
             </a:pPr>
             <a:r>
-              <a:rPr sz="1500" b="0">
+              <a:rPr sz="1725" b="0">
                 <a:solidFill>
                   <a:srgbClr val="17253A"/>
                 </a:solidFill>
@@ -8545,7 +8549,7 @@
                 <a:ea typeface="Arial"/>
                 <a:cs typeface="Arial"/>
               </a:rPr>
-              <a:t>Set up the method: Undo operations in reverse order.</a:t>
+              <a:t>Divide both sides by 6: x + 4 = 12</a:t>
             </a:r>
           </a:p>
         </p:txBody>
@@ -8555,28 +8559,30 @@
           <p:cNvPr id="17" name="">
             <a:extLst xmlns:a="http://schemas.openxmlformats.org/drawingml/2006/main">
               <a:ext uri="{FF2B5EF4-FFF2-40B4-BE49-F238E27FC236}">
-                <a16:creationId xmlns:a16="http://schemas.microsoft.com/office/drawing/2014/main" id="{D4C28DB7-6C1E-4FD8-B496-BBF54ED8A848}"/>
-              </a:ext>
-            </a:extLst>
-          </p:cNvPr>
-          <p:cNvSpPr>
-            <a:spLocks xmlns:a="http://schemas.openxmlformats.org/drawingml/2006/main" noGrp="1"/>
-          </p:cNvSpPr>
-          <p:nvPr/>
-        </p:nvSpPr>
-        <p:spPr>
-          <a:xfrm xmlns:a="http://schemas.openxmlformats.org/drawingml/2006/main">
-            <a:off x="1000125" y="3733800"/>
-            <a:ext cx="476250" cy="476250"/>
-          </a:xfrm>
-          <a:prstGeom xmlns:a="http://schemas.openxmlformats.org/drawingml/2006/main" prst="ellipse">
+                <a16:creationId xmlns:a16="http://schemas.microsoft.com/office/drawing/2014/main" id="{74675401-86DD-4D57-8041-DF159BE265D5}"/>
+              </a:ext>
+            </a:extLst>
+          </p:cNvPr>
+          <p:cNvSpPr>
+            <a:spLocks xmlns:a="http://schemas.openxmlformats.org/drawingml/2006/main" noGrp="1"/>
+          </p:cNvSpPr>
+          <p:nvPr/>
+        </p:nvSpPr>
+        <p:spPr>
+          <a:xfrm xmlns:a="http://schemas.openxmlformats.org/drawingml/2006/main">
+            <a:off x="1714500" y="3819525"/>
+            <a:ext cx="9334500" cy="9525"/>
+          </a:xfrm>
+          <a:prstGeom xmlns:a="http://schemas.openxmlformats.org/drawingml/2006/main" prst="rect">
             <a:avLst/>
           </a:prstGeom>
           <a:solidFill xmlns:a="http://schemas.openxmlformats.org/drawingml/2006/main">
-            <a:srgbClr val="2C6E73"/>
+            <a:srgbClr val="D9E0E6"/>
           </a:solidFill>
           <a:ln xmlns:a="http://schemas.openxmlformats.org/drawingml/2006/main" w="0">
-            <a:noFill/>
+            <a:solidFill>
+              <a:srgbClr val="D9E0E6"/>
+            </a:solidFill>
           </a:ln>
         </p:spPr>
       </p:sp>
@@ -8585,19 +8591,19 @@
           <p:cNvPr id="18" name="">
             <a:extLst xmlns:a="http://schemas.openxmlformats.org/drawingml/2006/main">
               <a:ext uri="{FF2B5EF4-FFF2-40B4-BE49-F238E27FC236}">
-                <a16:creationId xmlns:a16="http://schemas.microsoft.com/office/drawing/2014/main" id="{D9837ED0-2223-4E44-87C2-D10C797DF81D}"/>
-              </a:ext>
-            </a:extLst>
-          </p:cNvPr>
-          <p:cNvSpPr>
-            <a:spLocks xmlns:a="http://schemas.openxmlformats.org/drawingml/2006/main" noGrp="1"/>
-          </p:cNvSpPr>
-          <p:nvPr/>
-        </p:nvSpPr>
-        <p:spPr>
-          <a:xfrm xmlns:a="http://schemas.openxmlformats.org/drawingml/2006/main">
-            <a:off x="1000125" y="3762375"/>
-            <a:ext cx="476250" cy="419100"/>
+                <a16:creationId xmlns:a16="http://schemas.microsoft.com/office/drawing/2014/main" id="{339515B7-A1B9-4D42-A9D6-8617C4B4D780}"/>
+              </a:ext>
+            </a:extLst>
+          </p:cNvPr>
+          <p:cNvSpPr>
+            <a:spLocks xmlns:a="http://schemas.openxmlformats.org/drawingml/2006/main" noGrp="1"/>
+          </p:cNvSpPr>
+          <p:nvPr/>
+        </p:nvSpPr>
+        <p:spPr>
+          <a:xfrm xmlns:a="http://schemas.openxmlformats.org/drawingml/2006/main">
+            <a:off x="1162050" y="3952875"/>
+            <a:ext cx="400050" cy="400050"/>
           </a:xfrm>
           <a:prstGeom xmlns:a="http://schemas.openxmlformats.org/drawingml/2006/main" prst="rect">
             <a:avLst/>
@@ -8614,9 +8620,9 @@
           <a:lstStyle xmlns:a="http://schemas.openxmlformats.org/drawingml/2006/main"/>
           <a:p xmlns:a="http://schemas.openxmlformats.org/drawingml/2006/main">
             <a:pPr algn="ctr">
-              <a:defRPr sz="1350" b="1">
-                <a:solidFill>
-                  <a:srgbClr val="FFFFFF"/>
+              <a:defRPr sz="1125" b="1">
+                <a:solidFill>
+                  <a:srgbClr val="2C6E73"/>
                 </a:solidFill>
                 <a:latin typeface="Arial"/>
                 <a:ea typeface="Arial"/>
@@ -8624,9 +8630,9 @@
               </a:defRPr>
             </a:pPr>
             <a:r>
-              <a:rPr sz="1350" b="1">
-                <a:solidFill>
-                  <a:srgbClr val="FFFFFF"/>
+              <a:rPr sz="1125" b="1">
+                <a:solidFill>
+                  <a:srgbClr val="2C6E73"/>
                 </a:solidFill>
                 <a:latin typeface="Arial"/>
                 <a:ea typeface="Arial"/>
@@ -8642,19 +8648,19 @@
           <p:cNvPr id="19" name="">
             <a:extLst xmlns:a="http://schemas.openxmlformats.org/drawingml/2006/main">
               <a:ext uri="{FF2B5EF4-FFF2-40B4-BE49-F238E27FC236}">
-                <a16:creationId xmlns:a16="http://schemas.microsoft.com/office/drawing/2014/main" id="{61405405-9BB4-4630-8642-1248D0516673}"/>
-              </a:ext>
-            </a:extLst>
-          </p:cNvPr>
-          <p:cNvSpPr>
-            <a:spLocks xmlns:a="http://schemas.openxmlformats.org/drawingml/2006/main" noGrp="1"/>
-          </p:cNvSpPr>
-          <p:nvPr/>
-        </p:nvSpPr>
-        <p:spPr>
-          <a:xfrm xmlns:a="http://schemas.openxmlformats.org/drawingml/2006/main">
-            <a:off x="1714500" y="3667125"/>
-            <a:ext cx="9429750" cy="609600"/>
+                <a16:creationId xmlns:a16="http://schemas.microsoft.com/office/drawing/2014/main" id="{F917A856-6037-4AFA-8539-4BA3457FCA16}"/>
+              </a:ext>
+            </a:extLst>
+          </p:cNvPr>
+          <p:cNvSpPr>
+            <a:spLocks xmlns:a="http://schemas.openxmlformats.org/drawingml/2006/main" noGrp="1"/>
+          </p:cNvSpPr>
+          <p:nvPr/>
+        </p:nvSpPr>
+        <p:spPr>
+          <a:xfrm xmlns:a="http://schemas.openxmlformats.org/drawingml/2006/main">
+            <a:off x="1714500" y="3867150"/>
+            <a:ext cx="9525000" cy="809625"/>
           </a:xfrm>
           <a:prstGeom xmlns:a="http://schemas.openxmlformats.org/drawingml/2006/main" prst="rect">
             <a:avLst/>
@@ -8671,7 +8677,7 @@
           <a:lstStyle xmlns:a="http://schemas.openxmlformats.org/drawingml/2006/main"/>
           <a:p xmlns:a="http://schemas.openxmlformats.org/drawingml/2006/main">
             <a:pPr algn="l">
-              <a:defRPr sz="1500" b="0">
+              <a:defRPr sz="1725" b="0">
                 <a:solidFill>
                   <a:srgbClr val="17253A"/>
                 </a:solidFill>
@@ -8681,7 +8687,7 @@
               </a:defRPr>
             </a:pPr>
             <a:r>
-              <a:rPr sz="1500" b="0">
+              <a:rPr sz="1725" b="0">
                 <a:solidFill>
                   <a:srgbClr val="17253A"/>
                 </a:solidFill>
@@ -8689,7 +8695,7 @@
                 <a:ea typeface="Arial"/>
                 <a:cs typeface="Arial"/>
               </a:rPr>
-              <a:t>Complete the calculation: x = 8.</a:t>
+              <a:t>Subtract 4 from both sides</a:t>
             </a:r>
           </a:p>
         </p:txBody>
@@ -8699,28 +8705,30 @@
           <p:cNvPr id="20" name="">
             <a:extLst xmlns:a="http://schemas.openxmlformats.org/drawingml/2006/main">
               <a:ext uri="{FF2B5EF4-FFF2-40B4-BE49-F238E27FC236}">
-                <a16:creationId xmlns:a16="http://schemas.microsoft.com/office/drawing/2014/main" id="{A7920EC3-6362-4BF0-ACA1-4A167E275697}"/>
-              </a:ext>
-            </a:extLst>
-          </p:cNvPr>
-          <p:cNvSpPr>
-            <a:spLocks xmlns:a="http://schemas.openxmlformats.org/drawingml/2006/main" noGrp="1"/>
-          </p:cNvSpPr>
-          <p:nvPr/>
-        </p:nvSpPr>
-        <p:spPr>
-          <a:xfrm xmlns:a="http://schemas.openxmlformats.org/drawingml/2006/main">
-            <a:off x="1000125" y="4476750"/>
-            <a:ext cx="476250" cy="476250"/>
-          </a:xfrm>
-          <a:prstGeom xmlns:a="http://schemas.openxmlformats.org/drawingml/2006/main" prst="ellipse">
+                <a16:creationId xmlns:a16="http://schemas.microsoft.com/office/drawing/2014/main" id="{A2D4EFF7-1DE8-43E2-8243-E9E183465FB2}"/>
+              </a:ext>
+            </a:extLst>
+          </p:cNvPr>
+          <p:cNvSpPr>
+            <a:spLocks xmlns:a="http://schemas.openxmlformats.org/drawingml/2006/main" noGrp="1"/>
+          </p:cNvSpPr>
+          <p:nvPr/>
+        </p:nvSpPr>
+        <p:spPr>
+          <a:xfrm xmlns:a="http://schemas.openxmlformats.org/drawingml/2006/main">
+            <a:off x="1714500" y="4695825"/>
+            <a:ext cx="9334500" cy="9525"/>
+          </a:xfrm>
+          <a:prstGeom xmlns:a="http://schemas.openxmlformats.org/drawingml/2006/main" prst="rect">
             <a:avLst/>
           </a:prstGeom>
           <a:solidFill xmlns:a="http://schemas.openxmlformats.org/drawingml/2006/main">
-            <a:srgbClr val="2C6E73"/>
+            <a:srgbClr val="D9E0E6"/>
           </a:solidFill>
           <a:ln xmlns:a="http://schemas.openxmlformats.org/drawingml/2006/main" w="0">
-            <a:noFill/>
+            <a:solidFill>
+              <a:srgbClr val="D9E0E6"/>
+            </a:solidFill>
           </a:ln>
         </p:spPr>
       </p:sp>
@@ -8729,19 +8737,19 @@
           <p:cNvPr id="21" name="">
             <a:extLst xmlns:a="http://schemas.openxmlformats.org/drawingml/2006/main">
               <a:ext uri="{FF2B5EF4-FFF2-40B4-BE49-F238E27FC236}">
-                <a16:creationId xmlns:a16="http://schemas.microsoft.com/office/drawing/2014/main" id="{4EB6081F-FA8A-43A8-80D4-D887B789362B}"/>
-              </a:ext>
-            </a:extLst>
-          </p:cNvPr>
-          <p:cNvSpPr>
-            <a:spLocks xmlns:a="http://schemas.openxmlformats.org/drawingml/2006/main" noGrp="1"/>
-          </p:cNvSpPr>
-          <p:nvPr/>
-        </p:nvSpPr>
-        <p:spPr>
-          <a:xfrm xmlns:a="http://schemas.openxmlformats.org/drawingml/2006/main">
-            <a:off x="1000125" y="4505325"/>
-            <a:ext cx="476250" cy="419100"/>
+                <a16:creationId xmlns:a16="http://schemas.microsoft.com/office/drawing/2014/main" id="{002C9B43-3B97-4565-BE2F-A7E522C008F0}"/>
+              </a:ext>
+            </a:extLst>
+          </p:cNvPr>
+          <p:cNvSpPr>
+            <a:spLocks xmlns:a="http://schemas.openxmlformats.org/drawingml/2006/main" noGrp="1"/>
+          </p:cNvSpPr>
+          <p:nvPr/>
+        </p:nvSpPr>
+        <p:spPr>
+          <a:xfrm xmlns:a="http://schemas.openxmlformats.org/drawingml/2006/main">
+            <a:off x="1162050" y="4829175"/>
+            <a:ext cx="400050" cy="400050"/>
           </a:xfrm>
           <a:prstGeom xmlns:a="http://schemas.openxmlformats.org/drawingml/2006/main" prst="rect">
             <a:avLst/>
@@ -8758,9 +8766,9 @@
           <a:lstStyle xmlns:a="http://schemas.openxmlformats.org/drawingml/2006/main"/>
           <a:p xmlns:a="http://schemas.openxmlformats.org/drawingml/2006/main">
             <a:pPr algn="ctr">
-              <a:defRPr sz="1350" b="1">
-                <a:solidFill>
-                  <a:srgbClr val="FFFFFF"/>
+              <a:defRPr sz="1125" b="1">
+                <a:solidFill>
+                  <a:srgbClr val="2F785D"/>
                 </a:solidFill>
                 <a:latin typeface="Arial"/>
                 <a:ea typeface="Arial"/>
@@ -8768,9 +8776,9 @@
               </a:defRPr>
             </a:pPr>
             <a:r>
-              <a:rPr sz="1350" b="1">
-                <a:solidFill>
-                  <a:srgbClr val="FFFFFF"/>
+              <a:rPr sz="1125" b="1">
+                <a:solidFill>
+                  <a:srgbClr val="2F785D"/>
                 </a:solidFill>
                 <a:latin typeface="Arial"/>
                 <a:ea typeface="Arial"/>
@@ -8786,19 +8794,19 @@
           <p:cNvPr id="22" name="">
             <a:extLst xmlns:a="http://schemas.openxmlformats.org/drawingml/2006/main">
               <a:ext uri="{FF2B5EF4-FFF2-40B4-BE49-F238E27FC236}">
-                <a16:creationId xmlns:a16="http://schemas.microsoft.com/office/drawing/2014/main" id="{32F30300-DF7E-4BC7-B8E9-0828F9C321D1}"/>
-              </a:ext>
-            </a:extLst>
-          </p:cNvPr>
-          <p:cNvSpPr>
-            <a:spLocks xmlns:a="http://schemas.openxmlformats.org/drawingml/2006/main" noGrp="1"/>
-          </p:cNvSpPr>
-          <p:nvPr/>
-        </p:nvSpPr>
-        <p:spPr>
-          <a:xfrm xmlns:a="http://schemas.openxmlformats.org/drawingml/2006/main">
-            <a:off x="1714500" y="4410075"/>
-            <a:ext cx="9429750" cy="609600"/>
+                <a16:creationId xmlns:a16="http://schemas.microsoft.com/office/drawing/2014/main" id="{F9022460-0729-4E20-89F7-FB20F6E9F665}"/>
+              </a:ext>
+            </a:extLst>
+          </p:cNvPr>
+          <p:cNvSpPr>
+            <a:spLocks xmlns:a="http://schemas.openxmlformats.org/drawingml/2006/main" noGrp="1"/>
+          </p:cNvSpPr>
+          <p:nvPr/>
+        </p:nvSpPr>
+        <p:spPr>
+          <a:xfrm xmlns:a="http://schemas.openxmlformats.org/drawingml/2006/main">
+            <a:off x="1714500" y="4743450"/>
+            <a:ext cx="9525000" cy="809625"/>
           </a:xfrm>
           <a:prstGeom xmlns:a="http://schemas.openxmlformats.org/drawingml/2006/main" prst="rect">
             <a:avLst/>
@@ -8815,7 +8823,7 @@
           <a:lstStyle xmlns:a="http://schemas.openxmlformats.org/drawingml/2006/main"/>
           <a:p xmlns:a="http://schemas.openxmlformats.org/drawingml/2006/main">
             <a:pPr algn="l">
-              <a:defRPr sz="1500" b="1">
+              <a:defRPr sz="1725" b="1">
                 <a:solidFill>
                   <a:srgbClr val="2F785D"/>
                 </a:solidFill>
@@ -8825,7 +8833,7 @@
               </a:defRPr>
             </a:pPr>
             <a:r>
-              <a:rPr sz="1500" b="1">
+              <a:rPr sz="1725" b="1">
                 <a:solidFill>
                   <a:srgbClr val="2F785D"/>
                 </a:solidFill>
@@ -8833,7 +8841,7 @@
                 <a:ea typeface="Arial"/>
                 <a:cs typeface="Arial"/>
               </a:rPr>
-              <a:t>Check the result: Substitute the solution to check the original equation.</a:t>
+              <a:t>x = 8</a:t>
             </a:r>
           </a:p>
         </p:txBody>
@@ -8841,7 +8849,7 @@
     </p:spTree>
     <p:extLst>
       <p:ext uri="{BB962C8B-B14F-4D97-AF65-F5344CB8AC3E}">
-        <p14:creationId xmlns:p14="http://schemas.microsoft.com/office/powerpoint/2010/main" val="1472511298"/>
+        <p14:creationId xmlns:p14="http://schemas.microsoft.com/office/powerpoint/2010/main" val="1711673647"/>
       </p:ext>
     </p:extLst>
   </p:cSld>
@@ -9134,7 +9142,7 @@
           <p:cNvPr id="15" name="">
             <a:extLst xmlns:a="http://schemas.openxmlformats.org/drawingml/2006/main">
               <a:ext uri="{FF2B5EF4-FFF2-40B4-BE49-F238E27FC236}">
-                <a16:creationId xmlns:a16="http://schemas.microsoft.com/office/drawing/2014/main" id="{D3FFFC41-FF7B-4858-ADEF-112321B441F7}"/>
+                <a16:creationId xmlns:a16="http://schemas.microsoft.com/office/drawing/2014/main" id="{50736224-F5E0-4865-951B-8644384E3834}"/>
               </a:ext>
             </a:extLst>
           </p:cNvPr>
@@ -9166,7 +9174,7 @@
           <p:cNvPr id="2" name="">
             <a:extLst xmlns:a="http://schemas.openxmlformats.org/drawingml/2006/main">
               <a:ext uri="{FF2B5EF4-FFF2-40B4-BE49-F238E27FC236}">
-                <a16:creationId xmlns:a16="http://schemas.microsoft.com/office/drawing/2014/main" id="{0ED1F6D5-2D9C-49EC-98C7-681CA464D770}"/>
+                <a16:creationId xmlns:a16="http://schemas.microsoft.com/office/drawing/2014/main" id="{670F0F6C-CAC5-4B9F-8B5C-8F1F3917C400}"/>
               </a:ext>
             </a:extLst>
           </p:cNvPr>
@@ -9223,7 +9231,7 @@
           <p:cNvPr id="3" name="">
             <a:extLst xmlns:a="http://schemas.openxmlformats.org/drawingml/2006/main">
               <a:ext uri="{FF2B5EF4-FFF2-40B4-BE49-F238E27FC236}">
-                <a16:creationId xmlns:a16="http://schemas.microsoft.com/office/drawing/2014/main" id="{D3010781-C43D-4835-97A4-70588FA3AAC7}"/>
+                <a16:creationId xmlns:a16="http://schemas.microsoft.com/office/drawing/2014/main" id="{AF82D186-EAC6-418A-91DA-B75EA50AB622}"/>
               </a:ext>
             </a:extLst>
           </p:cNvPr>
@@ -9255,7 +9263,7 @@
           <p:cNvPr id="4" name="">
             <a:extLst xmlns:a="http://schemas.openxmlformats.org/drawingml/2006/main">
               <a:ext uri="{FF2B5EF4-FFF2-40B4-BE49-F238E27FC236}">
-                <a16:creationId xmlns:a16="http://schemas.microsoft.com/office/drawing/2014/main" id="{D74A9C1F-0799-40D1-834F-01D9B3644A3D}"/>
+                <a16:creationId xmlns:a16="http://schemas.microsoft.com/office/drawing/2014/main" id="{BD0F9926-FE79-4BD4-9FCF-C516F5D69085}"/>
               </a:ext>
             </a:extLst>
           </p:cNvPr>
@@ -9312,7 +9320,7 @@
           <p:cNvPr id="5" name="">
             <a:extLst xmlns:a="http://schemas.openxmlformats.org/drawingml/2006/main">
               <a:ext uri="{FF2B5EF4-FFF2-40B4-BE49-F238E27FC236}">
-                <a16:creationId xmlns:a16="http://schemas.microsoft.com/office/drawing/2014/main" id="{3503100B-F1B3-448C-B0BE-1EBD7741CDE1}"/>
+                <a16:creationId xmlns:a16="http://schemas.microsoft.com/office/drawing/2014/main" id="{93573DD0-8CFB-4A5A-B9F6-6DCB0BD688FA}"/>
               </a:ext>
             </a:extLst>
           </p:cNvPr>
@@ -9369,7 +9377,7 @@
           <p:cNvPr id="6" name="">
             <a:extLst xmlns:a="http://schemas.openxmlformats.org/drawingml/2006/main">
               <a:ext uri="{FF2B5EF4-FFF2-40B4-BE49-F238E27FC236}">
-                <a16:creationId xmlns:a16="http://schemas.microsoft.com/office/drawing/2014/main" id="{3A744199-B1FC-498A-99B0-12D3FF933A47}"/>
+                <a16:creationId xmlns:a16="http://schemas.microsoft.com/office/drawing/2014/main" id="{BCA1528C-27CE-4FD0-AC02-A0C25FE20852}"/>
               </a:ext>
             </a:extLst>
           </p:cNvPr>
@@ -9426,7 +9434,7 @@
           <p:cNvPr id="7" name="">
             <a:extLst xmlns:a="http://schemas.openxmlformats.org/drawingml/2006/main">
               <a:ext uri="{FF2B5EF4-FFF2-40B4-BE49-F238E27FC236}">
-                <a16:creationId xmlns:a16="http://schemas.microsoft.com/office/drawing/2014/main" id="{F8A3FC12-349D-473F-A911-7D507AE83247}"/>
+                <a16:creationId xmlns:a16="http://schemas.microsoft.com/office/drawing/2014/main" id="{E6812FA2-1E17-4182-85A0-4560FD7168B9}"/>
               </a:ext>
             </a:extLst>
           </p:cNvPr>
@@ -9458,7 +9466,7 @@
           <p:cNvPr id="8" name="">
             <a:extLst xmlns:a="http://schemas.openxmlformats.org/drawingml/2006/main">
               <a:ext uri="{FF2B5EF4-FFF2-40B4-BE49-F238E27FC236}">
-                <a16:creationId xmlns:a16="http://schemas.microsoft.com/office/drawing/2014/main" id="{97E46FC1-C7C2-4810-8FA9-9166B0292DAF}"/>
+                <a16:creationId xmlns:a16="http://schemas.microsoft.com/office/drawing/2014/main" id="{31B6E3AB-B9B6-40B7-927F-A20D082A9E61}"/>
               </a:ext>
             </a:extLst>
           </p:cNvPr>
@@ -9515,7 +9523,7 @@
           <p:cNvPr id="9" name="">
             <a:extLst xmlns:a="http://schemas.openxmlformats.org/drawingml/2006/main">
               <a:ext uri="{FF2B5EF4-FFF2-40B4-BE49-F238E27FC236}">
-                <a16:creationId xmlns:a16="http://schemas.microsoft.com/office/drawing/2014/main" id="{927436EB-84C1-41F8-AEAC-38F7A27FCE95}"/>
+                <a16:creationId xmlns:a16="http://schemas.microsoft.com/office/drawing/2014/main" id="{26741E0B-12EA-4FDB-A9C6-669F60DAF5C9}"/>
               </a:ext>
             </a:extLst>
           </p:cNvPr>
@@ -9572,7 +9580,7 @@
           <p:cNvPr id="10" name="">
             <a:extLst xmlns:a="http://schemas.openxmlformats.org/drawingml/2006/main">
               <a:ext uri="{FF2B5EF4-FFF2-40B4-BE49-F238E27FC236}">
-                <a16:creationId xmlns:a16="http://schemas.microsoft.com/office/drawing/2014/main" id="{551ACFBD-2562-44F1-8934-720FAD2636EF}"/>
+                <a16:creationId xmlns:a16="http://schemas.microsoft.com/office/drawing/2014/main" id="{F9C7BB36-688F-420F-A94A-B426FC4C2DA5}"/>
               </a:ext>
             </a:extLst>
           </p:cNvPr>
@@ -9629,7 +9637,7 @@
           <p:cNvPr id="11" name="">
             <a:extLst xmlns:a="http://schemas.openxmlformats.org/drawingml/2006/main">
               <a:ext uri="{FF2B5EF4-FFF2-40B4-BE49-F238E27FC236}">
-                <a16:creationId xmlns:a16="http://schemas.microsoft.com/office/drawing/2014/main" id="{F916A716-AF4D-4E66-BF62-3F809502C6EB}"/>
+                <a16:creationId xmlns:a16="http://schemas.microsoft.com/office/drawing/2014/main" id="{356B1A38-8B16-4114-B1AF-CC10615353BB}"/>
               </a:ext>
             </a:extLst>
           </p:cNvPr>
@@ -9686,7 +9694,7 @@
           <p:cNvPr id="12" name="">
             <a:extLst xmlns:a="http://schemas.openxmlformats.org/drawingml/2006/main">
               <a:ext uri="{FF2B5EF4-FFF2-40B4-BE49-F238E27FC236}">
-                <a16:creationId xmlns:a16="http://schemas.microsoft.com/office/drawing/2014/main" id="{26E47133-E6ED-4444-BC22-6868ECC3668B}"/>
+                <a16:creationId xmlns:a16="http://schemas.microsoft.com/office/drawing/2014/main" id="{EA30AA6E-53FF-4CE8-85C8-39F2B6C42A83}"/>
               </a:ext>
             </a:extLst>
           </p:cNvPr>
@@ -9718,7 +9726,7 @@
           <p:cNvPr id="13" name="">
             <a:extLst xmlns:a="http://schemas.openxmlformats.org/drawingml/2006/main">
               <a:ext uri="{FF2B5EF4-FFF2-40B4-BE49-F238E27FC236}">
-                <a16:creationId xmlns:a16="http://schemas.microsoft.com/office/drawing/2014/main" id="{CBA61795-4E3F-4502-9332-243DF4797F47}"/>
+                <a16:creationId xmlns:a16="http://schemas.microsoft.com/office/drawing/2014/main" id="{0F97A04A-3259-4217-8A06-53694E5348BD}"/>
               </a:ext>
             </a:extLst>
           </p:cNvPr>
@@ -9775,7 +9783,7 @@
           <p:cNvPr id="14" name="">
             <a:extLst xmlns:a="http://schemas.openxmlformats.org/drawingml/2006/main">
               <a:ext uri="{FF2B5EF4-FFF2-40B4-BE49-F238E27FC236}">
-                <a16:creationId xmlns:a16="http://schemas.microsoft.com/office/drawing/2014/main" id="{0CAB22CF-F17E-49E7-B95B-A78EA3EC5959}"/>
+                <a16:creationId xmlns:a16="http://schemas.microsoft.com/office/drawing/2014/main" id="{62C92609-78B2-4199-A396-7B62FF126002}"/>
               </a:ext>
             </a:extLst>
           </p:cNvPr>
@@ -9830,7 +9838,7 @@
     </p:spTree>
     <p:extLst>
       <p:ext uri="{BB962C8B-B14F-4D97-AF65-F5344CB8AC3E}">
-        <p14:creationId xmlns:p14="http://schemas.microsoft.com/office/powerpoint/2010/main" val="788607952"/>
+        <p14:creationId xmlns:p14="http://schemas.microsoft.com/office/powerpoint/2010/main" val="767144764"/>
       </p:ext>
     </p:extLst>
   </p:cSld>
@@ -10031,7 +10039,7 @@
           <p:cNvPr id="16" name="">
             <a:extLst xmlns:a="http://schemas.openxmlformats.org/drawingml/2006/main">
               <a:ext uri="{FF2B5EF4-FFF2-40B4-BE49-F238E27FC236}">
-                <a16:creationId xmlns:a16="http://schemas.microsoft.com/office/drawing/2014/main" id="{BBB89347-7D02-424B-BB08-863809CE1BAA}"/>
+                <a16:creationId xmlns:a16="http://schemas.microsoft.com/office/drawing/2014/main" id="{5B3AE153-04D6-44C4-BEE0-E736C7F77981}"/>
               </a:ext>
             </a:extLst>
           </p:cNvPr>
@@ -10063,7 +10071,7 @@
           <p:cNvPr id="2" name="">
             <a:extLst xmlns:a="http://schemas.openxmlformats.org/drawingml/2006/main">
               <a:ext uri="{FF2B5EF4-FFF2-40B4-BE49-F238E27FC236}">
-                <a16:creationId xmlns:a16="http://schemas.microsoft.com/office/drawing/2014/main" id="{5D4FFF0F-A9D7-4CC1-BCA1-A8EA2CAB46E4}"/>
+                <a16:creationId xmlns:a16="http://schemas.microsoft.com/office/drawing/2014/main" id="{E7F9CB7C-DEC2-44BE-BE1E-513D8750D028}"/>
               </a:ext>
             </a:extLst>
           </p:cNvPr>
@@ -10120,7 +10128,7 @@
           <p:cNvPr id="3" name="">
             <a:extLst xmlns:a="http://schemas.openxmlformats.org/drawingml/2006/main">
               <a:ext uri="{FF2B5EF4-FFF2-40B4-BE49-F238E27FC236}">
-                <a16:creationId xmlns:a16="http://schemas.microsoft.com/office/drawing/2014/main" id="{43F1770E-71A4-4A06-B9E9-813BD5196821}"/>
+                <a16:creationId xmlns:a16="http://schemas.microsoft.com/office/drawing/2014/main" id="{B77986DC-F435-4BF7-9731-171FE284A49A}"/>
               </a:ext>
             </a:extLst>
           </p:cNvPr>
@@ -10152,7 +10160,7 @@
           <p:cNvPr id="4" name="">
             <a:extLst xmlns:a="http://schemas.openxmlformats.org/drawingml/2006/main">
               <a:ext uri="{FF2B5EF4-FFF2-40B4-BE49-F238E27FC236}">
-                <a16:creationId xmlns:a16="http://schemas.microsoft.com/office/drawing/2014/main" id="{9F2B583B-6076-40E9-AD9E-4C6DD2259A82}"/>
+                <a16:creationId xmlns:a16="http://schemas.microsoft.com/office/drawing/2014/main" id="{3655FD37-69FC-4E67-A458-38FD985AC98D}"/>
               </a:ext>
             </a:extLst>
           </p:cNvPr>
@@ -10209,7 +10217,7 @@
           <p:cNvPr id="5" name="">
             <a:extLst xmlns:a="http://schemas.openxmlformats.org/drawingml/2006/main">
               <a:ext uri="{FF2B5EF4-FFF2-40B4-BE49-F238E27FC236}">
-                <a16:creationId xmlns:a16="http://schemas.microsoft.com/office/drawing/2014/main" id="{38E7256D-F55E-4127-8710-CE1C5B615B5E}"/>
+                <a16:creationId xmlns:a16="http://schemas.microsoft.com/office/drawing/2014/main" id="{5FF3D211-2ABC-4BB1-AFC9-173EA6AD6DE0}"/>
               </a:ext>
             </a:extLst>
           </p:cNvPr>
@@ -10266,7 +10274,7 @@
           <p:cNvPr id="6" name="">
             <a:extLst xmlns:a="http://schemas.openxmlformats.org/drawingml/2006/main">
               <a:ext uri="{FF2B5EF4-FFF2-40B4-BE49-F238E27FC236}">
-                <a16:creationId xmlns:a16="http://schemas.microsoft.com/office/drawing/2014/main" id="{871CD428-9FF3-480D-922C-192E846FE9E7}"/>
+                <a16:creationId xmlns:a16="http://schemas.microsoft.com/office/drawing/2014/main" id="{BC82A39D-4F5A-4986-B83E-1C51BB68E794}"/>
               </a:ext>
             </a:extLst>
           </p:cNvPr>
@@ -10323,7 +10331,7 @@
           <p:cNvPr id="7" name="">
             <a:extLst xmlns:a="http://schemas.openxmlformats.org/drawingml/2006/main">
               <a:ext uri="{FF2B5EF4-FFF2-40B4-BE49-F238E27FC236}">
-                <a16:creationId xmlns:a16="http://schemas.microsoft.com/office/drawing/2014/main" id="{6470C827-7DFA-469E-91FA-18BAF3235DBF}"/>
+                <a16:creationId xmlns:a16="http://schemas.microsoft.com/office/drawing/2014/main" id="{8CCCAEB9-A4E3-421A-9B11-28D5F12B958E}"/>
               </a:ext>
             </a:extLst>
           </p:cNvPr>
@@ -10355,7 +10363,7 @@
           <p:cNvPr id="8" name="">
             <a:extLst xmlns:a="http://schemas.openxmlformats.org/drawingml/2006/main">
               <a:ext uri="{FF2B5EF4-FFF2-40B4-BE49-F238E27FC236}">
-                <a16:creationId xmlns:a16="http://schemas.microsoft.com/office/drawing/2014/main" id="{E9FCD372-60B5-4FD5-A0E3-3E05B83FC3FB}"/>
+                <a16:creationId xmlns:a16="http://schemas.microsoft.com/office/drawing/2014/main" id="{A1385D9A-406A-483D-9BF7-4120484E5325}"/>
               </a:ext>
             </a:extLst>
           </p:cNvPr>
@@ -10412,7 +10420,7 @@
           <p:cNvPr id="9" name="">
             <a:extLst xmlns:a="http://schemas.openxmlformats.org/drawingml/2006/main">
               <a:ext uri="{FF2B5EF4-FFF2-40B4-BE49-F238E27FC236}">
-                <a16:creationId xmlns:a16="http://schemas.microsoft.com/office/drawing/2014/main" id="{A3A0DEAF-60FD-43FD-909D-F3A32B0C3265}"/>
+                <a16:creationId xmlns:a16="http://schemas.microsoft.com/office/drawing/2014/main" id="{B542BC22-25DA-4F27-B2E8-EA5DB7A7A233}"/>
               </a:ext>
             </a:extLst>
           </p:cNvPr>
@@ -10469,7 +10477,7 @@
           <p:cNvPr id="10" name="">
             <a:extLst xmlns:a="http://schemas.openxmlformats.org/drawingml/2006/main">
               <a:ext uri="{FF2B5EF4-FFF2-40B4-BE49-F238E27FC236}">
-                <a16:creationId xmlns:a16="http://schemas.microsoft.com/office/drawing/2014/main" id="{D3A45EE9-699C-4948-B411-13169A968541}"/>
+                <a16:creationId xmlns:a16="http://schemas.microsoft.com/office/drawing/2014/main" id="{818F3D5B-D80F-407F-A91B-F0D7ACA97D8F}"/>
               </a:ext>
             </a:extLst>
           </p:cNvPr>
@@ -10526,7 +10534,7 @@
           <p:cNvPr id="11" name="">
             <a:extLst xmlns:a="http://schemas.openxmlformats.org/drawingml/2006/main">
               <a:ext uri="{FF2B5EF4-FFF2-40B4-BE49-F238E27FC236}">
-                <a16:creationId xmlns:a16="http://schemas.microsoft.com/office/drawing/2014/main" id="{B0CB8E44-4E2C-4FEE-9598-1EA8D5672055}"/>
+                <a16:creationId xmlns:a16="http://schemas.microsoft.com/office/drawing/2014/main" id="{E04850F6-7DE1-4061-8FB7-11DA4C53B170}"/>
               </a:ext>
             </a:extLst>
           </p:cNvPr>
@@ -10583,7 +10591,7 @@
           <p:cNvPr id="12" name="">
             <a:extLst xmlns:a="http://schemas.openxmlformats.org/drawingml/2006/main">
               <a:ext uri="{FF2B5EF4-FFF2-40B4-BE49-F238E27FC236}">
-                <a16:creationId xmlns:a16="http://schemas.microsoft.com/office/drawing/2014/main" id="{89A3C3B2-9BE7-4B2D-827C-153757B41BB3}"/>
+                <a16:creationId xmlns:a16="http://schemas.microsoft.com/office/drawing/2014/main" id="{644ACD72-E823-4F8C-A92A-5991320CCF8B}"/>
               </a:ext>
             </a:extLst>
           </p:cNvPr>
@@ -10640,7 +10648,7 @@
           <p:cNvPr id="13" name="">
             <a:extLst xmlns:a="http://schemas.openxmlformats.org/drawingml/2006/main">
               <a:ext uri="{FF2B5EF4-FFF2-40B4-BE49-F238E27FC236}">
-                <a16:creationId xmlns:a16="http://schemas.microsoft.com/office/drawing/2014/main" id="{4B5C5910-DC57-4F88-A9E4-0F83EB4D03C5}"/>
+                <a16:creationId xmlns:a16="http://schemas.microsoft.com/office/drawing/2014/main" id="{CE1FDAF2-FD30-42A0-9072-0AD510B64AA9}"/>
               </a:ext>
             </a:extLst>
           </p:cNvPr>
@@ -10697,7 +10705,7 @@
           <p:cNvPr id="14" name="">
             <a:extLst xmlns:a="http://schemas.openxmlformats.org/drawingml/2006/main">
               <a:ext uri="{FF2B5EF4-FFF2-40B4-BE49-F238E27FC236}">
-                <a16:creationId xmlns:a16="http://schemas.microsoft.com/office/drawing/2014/main" id="{14B0A600-6F9D-4E22-A259-2C3043451A04}"/>
+                <a16:creationId xmlns:a16="http://schemas.microsoft.com/office/drawing/2014/main" id="{0867BD1C-B363-4553-A6B6-7A56F35BC1CB}"/>
               </a:ext>
             </a:extLst>
           </p:cNvPr>
@@ -10754,7 +10762,7 @@
           <p:cNvPr id="15" name="">
             <a:extLst xmlns:a="http://schemas.openxmlformats.org/drawingml/2006/main">
               <a:ext uri="{FF2B5EF4-FFF2-40B4-BE49-F238E27FC236}">
-                <a16:creationId xmlns:a16="http://schemas.microsoft.com/office/drawing/2014/main" id="{80CECA0F-F7D4-4A79-8AB4-A564E01DDE4D}"/>
+                <a16:creationId xmlns:a16="http://schemas.microsoft.com/office/drawing/2014/main" id="{FA5E6338-6FD1-4403-B9DC-9F90338A351B}"/>
               </a:ext>
             </a:extLst>
           </p:cNvPr>
@@ -10809,7 +10817,7 @@
     </p:spTree>
     <p:extLst>
       <p:ext uri="{BB962C8B-B14F-4D97-AF65-F5344CB8AC3E}">
-        <p14:creationId xmlns:p14="http://schemas.microsoft.com/office/powerpoint/2010/main" val="56790519"/>
+        <p14:creationId xmlns:p14="http://schemas.microsoft.com/office/powerpoint/2010/main" val="305415602"/>
       </p:ext>
     </p:extLst>
   </p:cSld>
@@ -10964,7 +10972,7 @@
           <p:cNvPr id="16" name="">
             <a:extLst xmlns:a="http://schemas.openxmlformats.org/drawingml/2006/main">
               <a:ext uri="{FF2B5EF4-FFF2-40B4-BE49-F238E27FC236}">
-                <a16:creationId xmlns:a16="http://schemas.microsoft.com/office/drawing/2014/main" id="{49A4F48F-8218-4382-A5FF-9960396E6F7D}"/>
+                <a16:creationId xmlns:a16="http://schemas.microsoft.com/office/drawing/2014/main" id="{2598CFBE-8F22-4EF8-9E1D-21F83C259641}"/>
               </a:ext>
             </a:extLst>
           </p:cNvPr>
@@ -10996,7 +11004,7 @@
           <p:cNvPr id="2" name="">
             <a:extLst xmlns:a="http://schemas.openxmlformats.org/drawingml/2006/main">
               <a:ext uri="{FF2B5EF4-FFF2-40B4-BE49-F238E27FC236}">
-                <a16:creationId xmlns:a16="http://schemas.microsoft.com/office/drawing/2014/main" id="{6AEEC279-03C2-4083-B760-19BF9E43E6B8}"/>
+                <a16:creationId xmlns:a16="http://schemas.microsoft.com/office/drawing/2014/main" id="{2F202D10-97D5-4AE1-9D01-20729F0B1EBF}"/>
               </a:ext>
             </a:extLst>
           </p:cNvPr>
@@ -11053,7 +11061,7 @@
           <p:cNvPr id="3" name="">
             <a:extLst xmlns:a="http://schemas.openxmlformats.org/drawingml/2006/main">
               <a:ext uri="{FF2B5EF4-FFF2-40B4-BE49-F238E27FC236}">
-                <a16:creationId xmlns:a16="http://schemas.microsoft.com/office/drawing/2014/main" id="{16F53D46-816E-4A0C-A657-A113C2CA6991}"/>
+                <a16:creationId xmlns:a16="http://schemas.microsoft.com/office/drawing/2014/main" id="{8BE80E28-CB3A-47D1-AC3B-C3B33A413580}"/>
               </a:ext>
             </a:extLst>
           </p:cNvPr>
@@ -11085,7 +11093,7 @@
           <p:cNvPr id="4" name="">
             <a:extLst xmlns:a="http://schemas.openxmlformats.org/drawingml/2006/main">
               <a:ext uri="{FF2B5EF4-FFF2-40B4-BE49-F238E27FC236}">
-                <a16:creationId xmlns:a16="http://schemas.microsoft.com/office/drawing/2014/main" id="{D7BC5CDB-A63F-4C8C-B77B-23AFCA0F89EF}"/>
+                <a16:creationId xmlns:a16="http://schemas.microsoft.com/office/drawing/2014/main" id="{53650076-4E2A-4AE7-81AF-F716344C0266}"/>
               </a:ext>
             </a:extLst>
           </p:cNvPr>
@@ -11142,7 +11150,7 @@
           <p:cNvPr id="5" name="">
             <a:extLst xmlns:a="http://schemas.openxmlformats.org/drawingml/2006/main">
               <a:ext uri="{FF2B5EF4-FFF2-40B4-BE49-F238E27FC236}">
-                <a16:creationId xmlns:a16="http://schemas.microsoft.com/office/drawing/2014/main" id="{370F626A-43C5-40D9-8CA2-8A569816DBCF}"/>
+                <a16:creationId xmlns:a16="http://schemas.microsoft.com/office/drawing/2014/main" id="{6BEDD1B4-097A-437D-9652-B25C9B011B1B}"/>
               </a:ext>
             </a:extLst>
           </p:cNvPr>
@@ -11199,7 +11207,7 @@
           <p:cNvPr id="6" name="">
             <a:extLst xmlns:a="http://schemas.openxmlformats.org/drawingml/2006/main">
               <a:ext uri="{FF2B5EF4-FFF2-40B4-BE49-F238E27FC236}">
-                <a16:creationId xmlns:a16="http://schemas.microsoft.com/office/drawing/2014/main" id="{35C0D747-13FE-4C09-B421-648F10183A89}"/>
+                <a16:creationId xmlns:a16="http://schemas.microsoft.com/office/drawing/2014/main" id="{3304B1A3-35C6-49D2-8B00-9E705EC5E89E}"/>
               </a:ext>
             </a:extLst>
           </p:cNvPr>
@@ -11256,7 +11264,7 @@
           <p:cNvPr id="7" name="">
             <a:extLst xmlns:a="http://schemas.openxmlformats.org/drawingml/2006/main">
               <a:ext uri="{FF2B5EF4-FFF2-40B4-BE49-F238E27FC236}">
-                <a16:creationId xmlns:a16="http://schemas.microsoft.com/office/drawing/2014/main" id="{557101BC-A836-4B40-93BE-6E296D790BF8}"/>
+                <a16:creationId xmlns:a16="http://schemas.microsoft.com/office/drawing/2014/main" id="{99734348-43EE-4F0D-A5DD-3A83CA1E2755}"/>
               </a:ext>
             </a:extLst>
           </p:cNvPr>
@@ -11288,7 +11296,7 @@
           <p:cNvPr id="8" name="">
             <a:extLst xmlns:a="http://schemas.openxmlformats.org/drawingml/2006/main">
               <a:ext uri="{FF2B5EF4-FFF2-40B4-BE49-F238E27FC236}">
-                <a16:creationId xmlns:a16="http://schemas.microsoft.com/office/drawing/2014/main" id="{6CFE5941-6CFD-46AB-A39B-1685999448DF}"/>
+                <a16:creationId xmlns:a16="http://schemas.microsoft.com/office/drawing/2014/main" id="{E995FE38-51F8-4AED-B6E8-3D0E1A99A1C1}"/>
               </a:ext>
             </a:extLst>
           </p:cNvPr>
@@ -11345,7 +11353,7 @@
           <p:cNvPr id="9" name="">
             <a:extLst xmlns:a="http://schemas.openxmlformats.org/drawingml/2006/main">
               <a:ext uri="{FF2B5EF4-FFF2-40B4-BE49-F238E27FC236}">
-                <a16:creationId xmlns:a16="http://schemas.microsoft.com/office/drawing/2014/main" id="{A6C1918C-487B-4F0D-8FE1-6D9E361B8235}"/>
+                <a16:creationId xmlns:a16="http://schemas.microsoft.com/office/drawing/2014/main" id="{1F0EDEEB-1E54-4251-A5BD-8D17BF5F07F6}"/>
               </a:ext>
             </a:extLst>
           </p:cNvPr>
@@ -11406,7 +11414,7 @@
           <p:nvPr/>
         </p:nvPicPr>
         <p:blipFill>
-          <a:blip xmlns:r="http://schemas.openxmlformats.org/officeDocument/2006/relationships" xmlns:a="http://schemas.openxmlformats.org/drawingml/2006/main" r:embed="R41f5cd68010e4fd4"/>
+          <a:blip xmlns:r="http://schemas.openxmlformats.org/officeDocument/2006/relationships" xmlns:a="http://schemas.openxmlformats.org/drawingml/2006/main" r:embed="Rb02810ae893d42e4"/>
           <a:stretch xmlns:a="http://schemas.openxmlformats.org/drawingml/2006/main"/>
         </p:blipFill>
         <p:spPr>
@@ -11424,7 +11432,7 @@
           <p:cNvPr id="11" name="">
             <a:extLst xmlns:a="http://schemas.openxmlformats.org/drawingml/2006/main">
               <a:ext uri="{FF2B5EF4-FFF2-40B4-BE49-F238E27FC236}">
-                <a16:creationId xmlns:a16="http://schemas.microsoft.com/office/drawing/2014/main" id="{2DFF1301-0720-4D4C-9BCC-4C63D4254C9C}"/>
+                <a16:creationId xmlns:a16="http://schemas.microsoft.com/office/drawing/2014/main" id="{BBD2AEE7-484B-48C6-926F-2FEA6375B2B2}"/>
               </a:ext>
             </a:extLst>
           </p:cNvPr>
@@ -11481,7 +11489,7 @@
           <p:cNvPr id="12" name="">
             <a:extLst xmlns:a="http://schemas.openxmlformats.org/drawingml/2006/main">
               <a:ext uri="{FF2B5EF4-FFF2-40B4-BE49-F238E27FC236}">
-                <a16:creationId xmlns:a16="http://schemas.microsoft.com/office/drawing/2014/main" id="{FF77E95C-A11D-4C7E-BB2F-3C5D726D00A0}"/>
+                <a16:creationId xmlns:a16="http://schemas.microsoft.com/office/drawing/2014/main" id="{7F64AA18-9373-4C79-9998-A9A35B339888}"/>
               </a:ext>
             </a:extLst>
           </p:cNvPr>
@@ -11538,7 +11546,7 @@
           <p:cNvPr id="13" name="">
             <a:extLst xmlns:a="http://schemas.openxmlformats.org/drawingml/2006/main">
               <a:ext uri="{FF2B5EF4-FFF2-40B4-BE49-F238E27FC236}">
-                <a16:creationId xmlns:a16="http://schemas.microsoft.com/office/drawing/2014/main" id="{1D3CB13A-3216-4847-80F8-C3FE8AC07F87}"/>
+                <a16:creationId xmlns:a16="http://schemas.microsoft.com/office/drawing/2014/main" id="{0A99F6C2-EBFA-4CC8-B9F2-E634B0ED6A1D}"/>
               </a:ext>
             </a:extLst>
           </p:cNvPr>
@@ -11570,7 +11578,7 @@
           <p:cNvPr id="14" name="">
             <a:extLst xmlns:a="http://schemas.openxmlformats.org/drawingml/2006/main">
               <a:ext uri="{FF2B5EF4-FFF2-40B4-BE49-F238E27FC236}">
-                <a16:creationId xmlns:a16="http://schemas.microsoft.com/office/drawing/2014/main" id="{00881E5B-EF34-49FA-BCE7-1E38CBB8813D}"/>
+                <a16:creationId xmlns:a16="http://schemas.microsoft.com/office/drawing/2014/main" id="{1B3A0C01-C051-4ABC-B191-4BBF26EEC354}"/>
               </a:ext>
             </a:extLst>
           </p:cNvPr>
@@ -11627,7 +11635,7 @@
           <p:cNvPr id="15" name="">
             <a:extLst xmlns:a="http://schemas.openxmlformats.org/drawingml/2006/main">
               <a:ext uri="{FF2B5EF4-FFF2-40B4-BE49-F238E27FC236}">
-                <a16:creationId xmlns:a16="http://schemas.microsoft.com/office/drawing/2014/main" id="{32A5F413-75BD-426B-84DF-EFC9BC33027B}"/>
+                <a16:creationId xmlns:a16="http://schemas.microsoft.com/office/drawing/2014/main" id="{0940044A-A51A-43FE-9FAE-68F2B8468C9C}"/>
               </a:ext>
             </a:extLst>
           </p:cNvPr>
@@ -11682,7 +11690,7 @@
     </p:spTree>
     <p:extLst>
       <p:ext uri="{BB962C8B-B14F-4D97-AF65-F5344CB8AC3E}">
-        <p14:creationId xmlns:p14="http://schemas.microsoft.com/office/powerpoint/2010/main" val="101276244"/>
+        <p14:creationId xmlns:p14="http://schemas.microsoft.com/office/powerpoint/2010/main" val="290743645"/>
       </p:ext>
     </p:extLst>
   </p:cSld>
@@ -11837,7 +11845,7 @@
           <p:cNvPr id="23" name="">
             <a:extLst xmlns:a="http://schemas.openxmlformats.org/drawingml/2006/main">
               <a:ext uri="{FF2B5EF4-FFF2-40B4-BE49-F238E27FC236}">
-                <a16:creationId xmlns:a16="http://schemas.microsoft.com/office/drawing/2014/main" id="{235A2C5E-D3D4-4152-A012-7D7CD99E1B51}"/>
+                <a16:creationId xmlns:a16="http://schemas.microsoft.com/office/drawing/2014/main" id="{5C4CECFF-F782-4A78-B7B2-5E65080210DC}"/>
               </a:ext>
             </a:extLst>
           </p:cNvPr>
@@ -11869,7 +11877,7 @@
           <p:cNvPr id="2" name="">
             <a:extLst xmlns:a="http://schemas.openxmlformats.org/drawingml/2006/main">
               <a:ext uri="{FF2B5EF4-FFF2-40B4-BE49-F238E27FC236}">
-                <a16:creationId xmlns:a16="http://schemas.microsoft.com/office/drawing/2014/main" id="{3DA26366-E95D-465A-A139-E2128044D30F}"/>
+                <a16:creationId xmlns:a16="http://schemas.microsoft.com/office/drawing/2014/main" id="{34B99355-A0D2-4CEC-BA5E-F29B2BE45E2C}"/>
               </a:ext>
             </a:extLst>
           </p:cNvPr>
@@ -11926,7 +11934,7 @@
           <p:cNvPr id="3" name="">
             <a:extLst xmlns:a="http://schemas.openxmlformats.org/drawingml/2006/main">
               <a:ext uri="{FF2B5EF4-FFF2-40B4-BE49-F238E27FC236}">
-                <a16:creationId xmlns:a16="http://schemas.microsoft.com/office/drawing/2014/main" id="{20EBCEFF-65B4-4C1B-B147-E3B72BAB3699}"/>
+                <a16:creationId xmlns:a16="http://schemas.microsoft.com/office/drawing/2014/main" id="{5A64A37E-B09D-49D3-BC8A-B7AEC475265E}"/>
               </a:ext>
             </a:extLst>
           </p:cNvPr>
@@ -11958,7 +11966,7 @@
           <p:cNvPr id="4" name="">
             <a:extLst xmlns:a="http://schemas.openxmlformats.org/drawingml/2006/main">
               <a:ext uri="{FF2B5EF4-FFF2-40B4-BE49-F238E27FC236}">
-                <a16:creationId xmlns:a16="http://schemas.microsoft.com/office/drawing/2014/main" id="{7B1B3669-614B-4ECA-8B57-C4CED58D34E0}"/>
+                <a16:creationId xmlns:a16="http://schemas.microsoft.com/office/drawing/2014/main" id="{509502A3-7F06-4BF7-A5BC-E47D234920F6}"/>
               </a:ext>
             </a:extLst>
           </p:cNvPr>
@@ -12015,7 +12023,7 @@
           <p:cNvPr id="5" name="">
             <a:extLst xmlns:a="http://schemas.openxmlformats.org/drawingml/2006/main">
               <a:ext uri="{FF2B5EF4-FFF2-40B4-BE49-F238E27FC236}">
-                <a16:creationId xmlns:a16="http://schemas.microsoft.com/office/drawing/2014/main" id="{788057C7-C49D-45E2-B89A-7A9091647339}"/>
+                <a16:creationId xmlns:a16="http://schemas.microsoft.com/office/drawing/2014/main" id="{1810BC7E-978A-4F3C-A5DF-495715192C2D}"/>
               </a:ext>
             </a:extLst>
           </p:cNvPr>
@@ -12072,7 +12080,7 @@
           <p:cNvPr id="6" name="">
             <a:extLst xmlns:a="http://schemas.openxmlformats.org/drawingml/2006/main">
               <a:ext uri="{FF2B5EF4-FFF2-40B4-BE49-F238E27FC236}">
-                <a16:creationId xmlns:a16="http://schemas.microsoft.com/office/drawing/2014/main" id="{4CC59F3F-3F1C-4369-BF91-DD78F602D3A0}"/>
+                <a16:creationId xmlns:a16="http://schemas.microsoft.com/office/drawing/2014/main" id="{5F449EBA-4D47-4C98-96B1-3A693E333E58}"/>
               </a:ext>
             </a:extLst>
           </p:cNvPr>
@@ -12129,7 +12137,7 @@
           <p:cNvPr id="7" name="">
             <a:extLst xmlns:a="http://schemas.openxmlformats.org/drawingml/2006/main">
               <a:ext uri="{FF2B5EF4-FFF2-40B4-BE49-F238E27FC236}">
-                <a16:creationId xmlns:a16="http://schemas.microsoft.com/office/drawing/2014/main" id="{DEA1AFAC-7BD6-4F01-8530-C99DD87CE133}"/>
+                <a16:creationId xmlns:a16="http://schemas.microsoft.com/office/drawing/2014/main" id="{2481B19E-2882-4D87-B086-37013311F754}"/>
               </a:ext>
             </a:extLst>
           </p:cNvPr>
@@ -12161,7 +12169,7 @@
           <p:cNvPr id="8" name="">
             <a:extLst xmlns:a="http://schemas.openxmlformats.org/drawingml/2006/main">
               <a:ext uri="{FF2B5EF4-FFF2-40B4-BE49-F238E27FC236}">
-                <a16:creationId xmlns:a16="http://schemas.microsoft.com/office/drawing/2014/main" id="{C8F2CD4C-4EAC-4D4B-ADD1-B23F45C40EE2}"/>
+                <a16:creationId xmlns:a16="http://schemas.microsoft.com/office/drawing/2014/main" id="{85748054-1EB8-49D3-A020-5366EB118CDA}"/>
               </a:ext>
             </a:extLst>
           </p:cNvPr>
@@ -12218,7 +12226,7 @@
           <p:cNvPr id="9" name="">
             <a:extLst xmlns:a="http://schemas.openxmlformats.org/drawingml/2006/main">
               <a:ext uri="{FF2B5EF4-FFF2-40B4-BE49-F238E27FC236}">
-                <a16:creationId xmlns:a16="http://schemas.microsoft.com/office/drawing/2014/main" id="{BCA7E6D4-4317-4FE7-BC76-09321EB15EA4}"/>
+                <a16:creationId xmlns:a16="http://schemas.microsoft.com/office/drawing/2014/main" id="{AE41BF57-59F9-474F-B7D6-89F4FE3E368E}"/>
               </a:ext>
             </a:extLst>
           </p:cNvPr>
@@ -12275,7 +12283,7 @@
           <p:cNvPr id="10" name="">
             <a:extLst xmlns:a="http://schemas.openxmlformats.org/drawingml/2006/main">
               <a:ext uri="{FF2B5EF4-FFF2-40B4-BE49-F238E27FC236}">
-                <a16:creationId xmlns:a16="http://schemas.microsoft.com/office/drawing/2014/main" id="{F497EF33-9BAD-40BA-8B12-0454C6676F61}"/>
+                <a16:creationId xmlns:a16="http://schemas.microsoft.com/office/drawing/2014/main" id="{31C45A17-4AE0-4F98-96E1-ADF8B7235EC4}"/>
               </a:ext>
             </a:extLst>
           </p:cNvPr>
@@ -12309,7 +12317,7 @@
           <p:cNvPr id="11" name="">
             <a:extLst xmlns:a="http://schemas.openxmlformats.org/drawingml/2006/main">
               <a:ext uri="{FF2B5EF4-FFF2-40B4-BE49-F238E27FC236}">
-                <a16:creationId xmlns:a16="http://schemas.microsoft.com/office/drawing/2014/main" id="{AC8E13EB-7075-42EE-AB5A-272CC8CE3B46}"/>
+                <a16:creationId xmlns:a16="http://schemas.microsoft.com/office/drawing/2014/main" id="{826DC26A-5F67-4861-BBC7-A2E3B91460D1}"/>
               </a:ext>
             </a:extLst>
           </p:cNvPr>
@@ -12341,7 +12349,7 @@
           <p:cNvPr id="12" name="">
             <a:extLst xmlns:a="http://schemas.openxmlformats.org/drawingml/2006/main">
               <a:ext uri="{FF2B5EF4-FFF2-40B4-BE49-F238E27FC236}">
-                <a16:creationId xmlns:a16="http://schemas.microsoft.com/office/drawing/2014/main" id="{8355D82A-43FF-4181-B2FF-0F30698D8A95}"/>
+                <a16:creationId xmlns:a16="http://schemas.microsoft.com/office/drawing/2014/main" id="{9F4445D9-C7FB-4382-9AB8-FBBA1D845DB5}"/>
               </a:ext>
             </a:extLst>
           </p:cNvPr>
@@ -12398,7 +12406,7 @@
           <p:cNvPr id="13" name="">
             <a:extLst xmlns:a="http://schemas.openxmlformats.org/drawingml/2006/main">
               <a:ext uri="{FF2B5EF4-FFF2-40B4-BE49-F238E27FC236}">
-                <a16:creationId xmlns:a16="http://schemas.microsoft.com/office/drawing/2014/main" id="{DC149B06-03ED-4CC5-ADD8-98174FBEF303}"/>
+                <a16:creationId xmlns:a16="http://schemas.microsoft.com/office/drawing/2014/main" id="{81257E44-D480-42CB-B432-4E1BC5A5F4C0}"/>
               </a:ext>
             </a:extLst>
           </p:cNvPr>
@@ -12455,7 +12463,7 @@
           <p:cNvPr id="14" name="">
             <a:extLst xmlns:a="http://schemas.openxmlformats.org/drawingml/2006/main">
               <a:ext uri="{FF2B5EF4-FFF2-40B4-BE49-F238E27FC236}">
-                <a16:creationId xmlns:a16="http://schemas.microsoft.com/office/drawing/2014/main" id="{1E9354E6-8B89-4EB2-B293-5F44E4A657A0}"/>
+                <a16:creationId xmlns:a16="http://schemas.microsoft.com/office/drawing/2014/main" id="{9D4BAD8D-2747-41E0-BA1A-C27691E67212}"/>
               </a:ext>
             </a:extLst>
           </p:cNvPr>
@@ -12489,7 +12497,7 @@
           <p:cNvPr id="15" name="">
             <a:extLst xmlns:a="http://schemas.openxmlformats.org/drawingml/2006/main">
               <a:ext uri="{FF2B5EF4-FFF2-40B4-BE49-F238E27FC236}">
-                <a16:creationId xmlns:a16="http://schemas.microsoft.com/office/drawing/2014/main" id="{B162F588-5090-4BA3-87E3-55C6E7A80337}"/>
+                <a16:creationId xmlns:a16="http://schemas.microsoft.com/office/drawing/2014/main" id="{01FF9DB9-3C81-4FCD-8426-4301E83E4163}"/>
               </a:ext>
             </a:extLst>
           </p:cNvPr>
@@ -12521,7 +12529,7 @@
           <p:cNvPr id="16" name="">
             <a:extLst xmlns:a="http://schemas.openxmlformats.org/drawingml/2006/main">
               <a:ext uri="{FF2B5EF4-FFF2-40B4-BE49-F238E27FC236}">
-                <a16:creationId xmlns:a16="http://schemas.microsoft.com/office/drawing/2014/main" id="{9CACE308-60D7-448B-90D0-67707F3E0677}"/>
+                <a16:creationId xmlns:a16="http://schemas.microsoft.com/office/drawing/2014/main" id="{301CB6B2-08D0-48A8-8F5F-95E1254D5E1C}"/>
               </a:ext>
             </a:extLst>
           </p:cNvPr>
@@ -12578,7 +12586,7 @@
           <p:cNvPr id="17" name="">
             <a:extLst xmlns:a="http://schemas.openxmlformats.org/drawingml/2006/main">
               <a:ext uri="{FF2B5EF4-FFF2-40B4-BE49-F238E27FC236}">
-                <a16:creationId xmlns:a16="http://schemas.microsoft.com/office/drawing/2014/main" id="{D0FAB1DA-F276-46C6-897F-995DA35161DD}"/>
+                <a16:creationId xmlns:a16="http://schemas.microsoft.com/office/drawing/2014/main" id="{8E1AF3C8-F5DA-4E41-A792-4A1F7DC7B768}"/>
               </a:ext>
             </a:extLst>
           </p:cNvPr>
@@ -12635,7 +12643,7 @@
           <p:cNvPr id="18" name="">
             <a:extLst xmlns:a="http://schemas.openxmlformats.org/drawingml/2006/main">
               <a:ext uri="{FF2B5EF4-FFF2-40B4-BE49-F238E27FC236}">
-                <a16:creationId xmlns:a16="http://schemas.microsoft.com/office/drawing/2014/main" id="{16D92739-287F-46D4-A84D-6E967994CCB8}"/>
+                <a16:creationId xmlns:a16="http://schemas.microsoft.com/office/drawing/2014/main" id="{529EBB19-48E7-44EF-9D19-12CF028D251A}"/>
               </a:ext>
             </a:extLst>
           </p:cNvPr>
@@ -12669,7 +12677,7 @@
           <p:cNvPr id="19" name="">
             <a:extLst xmlns:a="http://schemas.openxmlformats.org/drawingml/2006/main">
               <a:ext uri="{FF2B5EF4-FFF2-40B4-BE49-F238E27FC236}">
-                <a16:creationId xmlns:a16="http://schemas.microsoft.com/office/drawing/2014/main" id="{5A2A9793-81C4-43CE-AD2C-F0CC3B6384CA}"/>
+                <a16:creationId xmlns:a16="http://schemas.microsoft.com/office/drawing/2014/main" id="{3CB0A8C8-4C19-4016-B7AD-0CDB0CB14E48}"/>
               </a:ext>
             </a:extLst>
           </p:cNvPr>
@@ -12701,7 +12709,7 @@
           <p:cNvPr id="20" name="">
             <a:extLst xmlns:a="http://schemas.openxmlformats.org/drawingml/2006/main">
               <a:ext uri="{FF2B5EF4-FFF2-40B4-BE49-F238E27FC236}">
-                <a16:creationId xmlns:a16="http://schemas.microsoft.com/office/drawing/2014/main" id="{9B2AFFA5-B1C1-466E-A115-70DB2FEE5015}"/>
+                <a16:creationId xmlns:a16="http://schemas.microsoft.com/office/drawing/2014/main" id="{7F27AB34-95C5-49EE-8E40-272375F27D80}"/>
               </a:ext>
             </a:extLst>
           </p:cNvPr>
@@ -12758,7 +12766,7 @@
           <p:cNvPr id="21" name="">
             <a:extLst xmlns:a="http://schemas.openxmlformats.org/drawingml/2006/main">
               <a:ext uri="{FF2B5EF4-FFF2-40B4-BE49-F238E27FC236}">
-                <a16:creationId xmlns:a16="http://schemas.microsoft.com/office/drawing/2014/main" id="{05183127-6670-4381-B365-497271040F99}"/>
+                <a16:creationId xmlns:a16="http://schemas.microsoft.com/office/drawing/2014/main" id="{34F5B212-D190-4B58-A4B4-7D622B75C6ED}"/>
               </a:ext>
             </a:extLst>
           </p:cNvPr>
@@ -12815,7 +12823,7 @@
           <p:cNvPr id="22" name="">
             <a:extLst xmlns:a="http://schemas.openxmlformats.org/drawingml/2006/main">
               <a:ext uri="{FF2B5EF4-FFF2-40B4-BE49-F238E27FC236}">
-                <a16:creationId xmlns:a16="http://schemas.microsoft.com/office/drawing/2014/main" id="{BD506391-C155-4326-AB81-E02166ABDDAF}"/>
+                <a16:creationId xmlns:a16="http://schemas.microsoft.com/office/drawing/2014/main" id="{296C673D-6073-4DD7-BD85-77D371FD0E28}"/>
               </a:ext>
             </a:extLst>
           </p:cNvPr>
@@ -12870,7 +12878,7 @@
     </p:spTree>
     <p:extLst>
       <p:ext uri="{BB962C8B-B14F-4D97-AF65-F5344CB8AC3E}">
-        <p14:creationId xmlns:p14="http://schemas.microsoft.com/office/powerpoint/2010/main" val="1912796909"/>
+        <p14:creationId xmlns:p14="http://schemas.microsoft.com/office/powerpoint/2010/main" val="442537265"/>
       </p:ext>
     </p:extLst>
   </p:cSld>
@@ -13071,7 +13079,7 @@
           <p:cNvPr id="22" name="">
             <a:extLst xmlns:a="http://schemas.openxmlformats.org/drawingml/2006/main">
               <a:ext uri="{FF2B5EF4-FFF2-40B4-BE49-F238E27FC236}">
-                <a16:creationId xmlns:a16="http://schemas.microsoft.com/office/drawing/2014/main" id="{162DC64D-9247-4AFE-B670-215DD9C4E943}"/>
+                <a16:creationId xmlns:a16="http://schemas.microsoft.com/office/drawing/2014/main" id="{967DA5C7-767F-4679-8772-B2279CDD0B1A}"/>
               </a:ext>
             </a:extLst>
           </p:cNvPr>
@@ -13103,7 +13111,7 @@
           <p:cNvPr id="2" name="">
             <a:extLst xmlns:a="http://schemas.openxmlformats.org/drawingml/2006/main">
               <a:ext uri="{FF2B5EF4-FFF2-40B4-BE49-F238E27FC236}">
-                <a16:creationId xmlns:a16="http://schemas.microsoft.com/office/drawing/2014/main" id="{21C1209C-551E-4CBA-AB81-D30A3A07F923}"/>
+                <a16:creationId xmlns:a16="http://schemas.microsoft.com/office/drawing/2014/main" id="{54EC154C-FFBA-47EE-BAD5-AA32562EB5D0}"/>
               </a:ext>
             </a:extLst>
           </p:cNvPr>
@@ -13160,7 +13168,7 @@
           <p:cNvPr id="3" name="">
             <a:extLst xmlns:a="http://schemas.openxmlformats.org/drawingml/2006/main">
               <a:ext uri="{FF2B5EF4-FFF2-40B4-BE49-F238E27FC236}">
-                <a16:creationId xmlns:a16="http://schemas.microsoft.com/office/drawing/2014/main" id="{DFD1ED74-7E1C-4CEF-AB76-71E80F5E3B23}"/>
+                <a16:creationId xmlns:a16="http://schemas.microsoft.com/office/drawing/2014/main" id="{6863C63B-34D8-4ACE-8C5C-8DA6B6D3BFA5}"/>
               </a:ext>
             </a:extLst>
           </p:cNvPr>
@@ -13192,7 +13200,7 @@
           <p:cNvPr id="4" name="">
             <a:extLst xmlns:a="http://schemas.openxmlformats.org/drawingml/2006/main">
               <a:ext uri="{FF2B5EF4-FFF2-40B4-BE49-F238E27FC236}">
-                <a16:creationId xmlns:a16="http://schemas.microsoft.com/office/drawing/2014/main" id="{81387F4D-A893-4EDD-8047-E6404A5D5830}"/>
+                <a16:creationId xmlns:a16="http://schemas.microsoft.com/office/drawing/2014/main" id="{69FD371B-FE04-43F7-8E44-992263652E64}"/>
               </a:ext>
             </a:extLst>
           </p:cNvPr>
@@ -13249,7 +13257,7 @@
           <p:cNvPr id="5" name="">
             <a:extLst xmlns:a="http://schemas.openxmlformats.org/drawingml/2006/main">
               <a:ext uri="{FF2B5EF4-FFF2-40B4-BE49-F238E27FC236}">
-                <a16:creationId xmlns:a16="http://schemas.microsoft.com/office/drawing/2014/main" id="{8D291C2C-9DC9-4A7F-8A95-F597E61370D9}"/>
+                <a16:creationId xmlns:a16="http://schemas.microsoft.com/office/drawing/2014/main" id="{12EE4412-B916-4750-A4FA-45A409F6C982}"/>
               </a:ext>
             </a:extLst>
           </p:cNvPr>
@@ -13306,7 +13314,7 @@
           <p:cNvPr id="6" name="">
             <a:extLst xmlns:a="http://schemas.openxmlformats.org/drawingml/2006/main">
               <a:ext uri="{FF2B5EF4-FFF2-40B4-BE49-F238E27FC236}">
-                <a16:creationId xmlns:a16="http://schemas.microsoft.com/office/drawing/2014/main" id="{2A2D43E8-E368-486C-984C-22AC84E59F10}"/>
+                <a16:creationId xmlns:a16="http://schemas.microsoft.com/office/drawing/2014/main" id="{BB797DFF-22D7-4672-A69E-90D0A1E66105}"/>
               </a:ext>
             </a:extLst>
           </p:cNvPr>
@@ -13363,7 +13371,7 @@
           <p:cNvPr id="7" name="">
             <a:extLst xmlns:a="http://schemas.openxmlformats.org/drawingml/2006/main">
               <a:ext uri="{FF2B5EF4-FFF2-40B4-BE49-F238E27FC236}">
-                <a16:creationId xmlns:a16="http://schemas.microsoft.com/office/drawing/2014/main" id="{E77787C2-5CB1-4025-8E75-005563E25585}"/>
+                <a16:creationId xmlns:a16="http://schemas.microsoft.com/office/drawing/2014/main" id="{29D5DE9E-92B9-4C9A-8CE1-9CA3F7A145A0}"/>
               </a:ext>
             </a:extLst>
           </p:cNvPr>
@@ -13395,7 +13403,7 @@
           <p:cNvPr id="8" name="">
             <a:extLst xmlns:a="http://schemas.openxmlformats.org/drawingml/2006/main">
               <a:ext uri="{FF2B5EF4-FFF2-40B4-BE49-F238E27FC236}">
-                <a16:creationId xmlns:a16="http://schemas.microsoft.com/office/drawing/2014/main" id="{44B20CCB-CAFD-4ED5-9391-8E37E446CBAE}"/>
+                <a16:creationId xmlns:a16="http://schemas.microsoft.com/office/drawing/2014/main" id="{19AB609A-DD08-40FB-8B4C-2DBD241431D8}"/>
               </a:ext>
             </a:extLst>
           </p:cNvPr>
@@ -13452,7 +13460,7 @@
           <p:cNvPr id="9" name="">
             <a:extLst xmlns:a="http://schemas.openxmlformats.org/drawingml/2006/main">
               <a:ext uri="{FF2B5EF4-FFF2-40B4-BE49-F238E27FC236}">
-                <a16:creationId xmlns:a16="http://schemas.microsoft.com/office/drawing/2014/main" id="{BBE183E0-0A10-40E4-84F8-A2E815263888}"/>
+                <a16:creationId xmlns:a16="http://schemas.microsoft.com/office/drawing/2014/main" id="{FC6E7DB4-577B-4049-904F-F155BD7FF16D}"/>
               </a:ext>
             </a:extLst>
           </p:cNvPr>
@@ -13509,7 +13517,7 @@
           <p:cNvPr id="10" name="">
             <a:extLst xmlns:a="http://schemas.openxmlformats.org/drawingml/2006/main">
               <a:ext uri="{FF2B5EF4-FFF2-40B4-BE49-F238E27FC236}">
-                <a16:creationId xmlns:a16="http://schemas.microsoft.com/office/drawing/2014/main" id="{D0FF552C-9CAC-4D42-8B15-D052983CDD2C}"/>
+                <a16:creationId xmlns:a16="http://schemas.microsoft.com/office/drawing/2014/main" id="{757CA781-61EA-4EAA-9A7F-87ADA20CDC71}"/>
               </a:ext>
             </a:extLst>
           </p:cNvPr>
@@ -13543,7 +13551,7 @@
           <p:cNvPr id="11" name="">
             <a:extLst xmlns:a="http://schemas.openxmlformats.org/drawingml/2006/main">
               <a:ext uri="{FF2B5EF4-FFF2-40B4-BE49-F238E27FC236}">
-                <a16:creationId xmlns:a16="http://schemas.microsoft.com/office/drawing/2014/main" id="{3CD9329D-E7EB-41AA-B651-1258ABE8CD66}"/>
+                <a16:creationId xmlns:a16="http://schemas.microsoft.com/office/drawing/2014/main" id="{0871E48B-9646-4DEB-8C56-B69ABDFCF319}"/>
               </a:ext>
             </a:extLst>
           </p:cNvPr>
@@ -13575,7 +13583,7 @@
           <p:cNvPr id="12" name="">
             <a:extLst xmlns:a="http://schemas.openxmlformats.org/drawingml/2006/main">
               <a:ext uri="{FF2B5EF4-FFF2-40B4-BE49-F238E27FC236}">
-                <a16:creationId xmlns:a16="http://schemas.microsoft.com/office/drawing/2014/main" id="{EE224C13-9515-4B12-A042-F311C075FC77}"/>
+                <a16:creationId xmlns:a16="http://schemas.microsoft.com/office/drawing/2014/main" id="{41B75050-20C6-4EB7-9715-97A421DD48EB}"/>
               </a:ext>
             </a:extLst>
           </p:cNvPr>
@@ -13632,7 +13640,7 @@
           <p:cNvPr id="13" name="">
             <a:extLst xmlns:a="http://schemas.openxmlformats.org/drawingml/2006/main">
               <a:ext uri="{FF2B5EF4-FFF2-40B4-BE49-F238E27FC236}">
-                <a16:creationId xmlns:a16="http://schemas.microsoft.com/office/drawing/2014/main" id="{49A5B519-153A-413D-A1EF-7498F711F0F9}"/>
+                <a16:creationId xmlns:a16="http://schemas.microsoft.com/office/drawing/2014/main" id="{A741F57A-8122-4F3F-A7F7-B02C61A8F5DE}"/>
               </a:ext>
             </a:extLst>
           </p:cNvPr>
@@ -13689,7 +13697,7 @@
           <p:cNvPr id="14" name="">
             <a:extLst xmlns:a="http://schemas.openxmlformats.org/drawingml/2006/main">
               <a:ext uri="{FF2B5EF4-FFF2-40B4-BE49-F238E27FC236}">
-                <a16:creationId xmlns:a16="http://schemas.microsoft.com/office/drawing/2014/main" id="{C2A5D651-7D87-4FEA-AEBB-ADBE464E7423}"/>
+                <a16:creationId xmlns:a16="http://schemas.microsoft.com/office/drawing/2014/main" id="{7437158F-1112-4F4D-B737-08A0DA487CAC}"/>
               </a:ext>
             </a:extLst>
           </p:cNvPr>
@@ -13723,7 +13731,7 @@
           <p:cNvPr id="15" name="">
             <a:extLst xmlns:a="http://schemas.openxmlformats.org/drawingml/2006/main">
               <a:ext uri="{FF2B5EF4-FFF2-40B4-BE49-F238E27FC236}">
-                <a16:creationId xmlns:a16="http://schemas.microsoft.com/office/drawing/2014/main" id="{E6E7A23E-1219-4C8E-8C6F-57A81B3C0E84}"/>
+                <a16:creationId xmlns:a16="http://schemas.microsoft.com/office/drawing/2014/main" id="{6AD9C6EF-FA55-43AB-A939-B6254E6BAE08}"/>
               </a:ext>
             </a:extLst>
           </p:cNvPr>
@@ -13755,7 +13763,7 @@
           <p:cNvPr id="16" name="">
             <a:extLst xmlns:a="http://schemas.openxmlformats.org/drawingml/2006/main">
               <a:ext uri="{FF2B5EF4-FFF2-40B4-BE49-F238E27FC236}">
-                <a16:creationId xmlns:a16="http://schemas.microsoft.com/office/drawing/2014/main" id="{43A19118-AB60-4652-9F1C-3E2B3735ACC7}"/>
+                <a16:creationId xmlns:a16="http://schemas.microsoft.com/office/drawing/2014/main" id="{F9971AFB-E426-4A74-88AD-87C12CEC0240}"/>
               </a:ext>
             </a:extLst>
           </p:cNvPr>
@@ -13812,7 +13820,7 @@
           <p:cNvPr id="17" name="">
             <a:extLst xmlns:a="http://schemas.openxmlformats.org/drawingml/2006/main">
               <a:ext uri="{FF2B5EF4-FFF2-40B4-BE49-F238E27FC236}">
-                <a16:creationId xmlns:a16="http://schemas.microsoft.com/office/drawing/2014/main" id="{923CBD85-7373-4892-BAD6-00E563C25164}"/>
+                <a16:creationId xmlns:a16="http://schemas.microsoft.com/office/drawing/2014/main" id="{5301DB61-CBAD-4F7F-A94A-D2730CD97B97}"/>
               </a:ext>
             </a:extLst>
           </p:cNvPr>
@@ -13869,7 +13877,7 @@
           <p:cNvPr id="18" name="">
             <a:extLst xmlns:a="http://schemas.openxmlformats.org/drawingml/2006/main">
               <a:ext uri="{FF2B5EF4-FFF2-40B4-BE49-F238E27FC236}">
-                <a16:creationId xmlns:a16="http://schemas.microsoft.com/office/drawing/2014/main" id="{F5D780E2-9247-4AAE-9D37-6F2006FF5F2F}"/>
+                <a16:creationId xmlns:a16="http://schemas.microsoft.com/office/drawing/2014/main" id="{F01EF5F3-5BFF-4BDF-A48F-BA0C1E76423A}"/>
               </a:ext>
             </a:extLst>
           </p:cNvPr>
@@ -13903,7 +13911,7 @@
           <p:cNvPr id="19" name="">
             <a:extLst xmlns:a="http://schemas.openxmlformats.org/drawingml/2006/main">
               <a:ext uri="{FF2B5EF4-FFF2-40B4-BE49-F238E27FC236}">
-                <a16:creationId xmlns:a16="http://schemas.microsoft.com/office/drawing/2014/main" id="{EFF1915D-5760-40B5-9D9A-CA251219992B}"/>
+                <a16:creationId xmlns:a16="http://schemas.microsoft.com/office/drawing/2014/main" id="{09C34B2A-E54B-4B3B-B25B-0C8F648AEEC4}"/>
               </a:ext>
             </a:extLst>
           </p:cNvPr>
@@ -13935,7 +13943,7 @@
           <p:cNvPr id="20" name="">
             <a:extLst xmlns:a="http://schemas.openxmlformats.org/drawingml/2006/main">
               <a:ext uri="{FF2B5EF4-FFF2-40B4-BE49-F238E27FC236}">
-                <a16:creationId xmlns:a16="http://schemas.microsoft.com/office/drawing/2014/main" id="{65A97240-45E6-4933-AFA0-221217CA6AFA}"/>
+                <a16:creationId xmlns:a16="http://schemas.microsoft.com/office/drawing/2014/main" id="{89309D63-CDE2-4A70-85C2-8C1E1CEA412B}"/>
               </a:ext>
             </a:extLst>
           </p:cNvPr>
@@ -13992,7 +14000,7 @@
           <p:cNvPr id="21" name="">
             <a:extLst xmlns:a="http://schemas.openxmlformats.org/drawingml/2006/main">
               <a:ext uri="{FF2B5EF4-FFF2-40B4-BE49-F238E27FC236}">
-                <a16:creationId xmlns:a16="http://schemas.microsoft.com/office/drawing/2014/main" id="{C87EE146-85E2-4183-AD6B-581C4B209971}"/>
+                <a16:creationId xmlns:a16="http://schemas.microsoft.com/office/drawing/2014/main" id="{CCC22C5A-A630-4AFE-9B2B-9CF51A46C582}"/>
               </a:ext>
             </a:extLst>
           </p:cNvPr>
@@ -14047,7 +14055,7 @@
     </p:spTree>
     <p:extLst>
       <p:ext uri="{BB962C8B-B14F-4D97-AF65-F5344CB8AC3E}">
-        <p14:creationId xmlns:p14="http://schemas.microsoft.com/office/powerpoint/2010/main" val="2137190677"/>
+        <p14:creationId xmlns:p14="http://schemas.microsoft.com/office/powerpoint/2010/main" val="2012529656"/>
       </p:ext>
     </p:extLst>
   </p:cSld>
